--- a/20_Projects/海音_心体の調律/タマラ/川越さん/20261014_ご縁と考え方_お食事の方.pptx
+++ b/20_Projects/海音_心体の調律/タマラ/川越さん/20261014_ご縁と考え方_お食事の方.pptx
@@ -3753,7 +3753,7 @@
         </p:nvSpPr>
         <p:spPr>
           <a:xfrm>
-            <a:off x="5897880" y="2221992"/>
+            <a:off x="5897880" y="2103120"/>
             <a:ext cx="384048" cy="384048"/>
           </a:xfrm>
           <a:prstGeom prst="ellipse">
@@ -3806,7 +3806,7 @@
         </p:nvSpPr>
         <p:spPr>
           <a:xfrm>
-            <a:off x="6400800" y="2148840"/>
+            <a:off x="6400800" y="2029968"/>
             <a:ext cx="5303520" cy="365760"/>
           </a:xfrm>
           <a:prstGeom prst="rect">
@@ -3845,7 +3845,7 @@
         </p:nvSpPr>
         <p:spPr>
           <a:xfrm>
-            <a:off x="6400800" y="2496312"/>
+            <a:off x="6400800" y="2377440"/>
             <a:ext cx="5303520" cy="594360"/>
           </a:xfrm>
           <a:prstGeom prst="rect">
@@ -3884,7 +3884,7 @@
         </p:nvSpPr>
         <p:spPr>
           <a:xfrm>
-            <a:off x="5897880" y="3154680"/>
+            <a:off x="5897880" y="2843784"/>
             <a:ext cx="384048" cy="384048"/>
           </a:xfrm>
           <a:prstGeom prst="ellipse">
@@ -3937,7 +3937,7 @@
         </p:nvSpPr>
         <p:spPr>
           <a:xfrm>
-            <a:off x="6400800" y="3081528"/>
+            <a:off x="6400800" y="2770632"/>
             <a:ext cx="5303520" cy="365760"/>
           </a:xfrm>
           <a:prstGeom prst="rect">
@@ -3976,7 +3976,7 @@
         </p:nvSpPr>
         <p:spPr>
           <a:xfrm>
-            <a:off x="6400800" y="3429000"/>
+            <a:off x="6400800" y="3118104"/>
             <a:ext cx="5303520" cy="594360"/>
           </a:xfrm>
           <a:prstGeom prst="rect">
@@ -4015,7 +4015,7 @@
         </p:nvSpPr>
         <p:spPr>
           <a:xfrm>
-            <a:off x="5897880" y="4087368"/>
+            <a:off x="5897880" y="3584448"/>
             <a:ext cx="384048" cy="384048"/>
           </a:xfrm>
           <a:prstGeom prst="ellipse">
@@ -4068,7 +4068,7 @@
         </p:nvSpPr>
         <p:spPr>
           <a:xfrm>
-            <a:off x="6400800" y="4014216"/>
+            <a:off x="6400800" y="3511296"/>
             <a:ext cx="5303520" cy="365760"/>
           </a:xfrm>
           <a:prstGeom prst="rect">
@@ -4107,7 +4107,7 @@
         </p:nvSpPr>
         <p:spPr>
           <a:xfrm>
-            <a:off x="6400800" y="4361688"/>
+            <a:off x="6400800" y="3858768"/>
             <a:ext cx="5303520" cy="594360"/>
           </a:xfrm>
           <a:prstGeom prst="rect">
@@ -4146,7 +4146,7 @@
         </p:nvSpPr>
         <p:spPr>
           <a:xfrm>
-            <a:off x="5897880" y="5020056"/>
+            <a:off x="5897880" y="4325112"/>
             <a:ext cx="384048" cy="384048"/>
           </a:xfrm>
           <a:prstGeom prst="ellipse">
@@ -4199,7 +4199,7 @@
         </p:nvSpPr>
         <p:spPr>
           <a:xfrm>
-            <a:off x="6400800" y="4946904"/>
+            <a:off x="6400800" y="4251960"/>
             <a:ext cx="5303520" cy="365760"/>
           </a:xfrm>
           <a:prstGeom prst="rect">
@@ -4238,7 +4238,7 @@
         </p:nvSpPr>
         <p:spPr>
           <a:xfrm>
-            <a:off x="6400800" y="5294376"/>
+            <a:off x="6400800" y="4599432"/>
             <a:ext cx="5303520" cy="594360"/>
           </a:xfrm>
           <a:prstGeom prst="rect">
@@ -4271,14 +4271,145 @@
       </p:sp>
       <p:sp>
         <p:nvSpPr>
-          <p:cNvPr id="26" name="Rounded Rectangle 25"/>
+          <p:cNvPr id="26" name="Oval 25"/>
           <p:cNvSpPr/>
           <p:nvPr/>
         </p:nvSpPr>
         <p:spPr>
           <a:xfrm>
-            <a:off x="5897880" y="5897880"/>
-            <a:ext cx="5806440" cy="594360"/>
+            <a:off x="5897880" y="5065776"/>
+            <a:ext cx="384048" cy="384048"/>
+          </a:xfrm>
+          <a:prstGeom prst="ellipse">
+            <a:avLst/>
+          </a:prstGeom>
+          <a:solidFill>
+            <a:srgbClr val="C9973A"/>
+          </a:solidFill>
+          <a:ln>
+            <a:noFill/>
+          </a:ln>
+          <a:effectLst/>
+        </p:spPr>
+        <p:style>
+          <a:lnRef idx="1">
+            <a:schemeClr val="accent1"/>
+          </a:lnRef>
+          <a:fillRef idx="3">
+            <a:schemeClr val="accent1"/>
+          </a:fillRef>
+          <a:effectRef idx="2">
+            <a:schemeClr val="accent1"/>
+          </a:effectRef>
+          <a:fontRef idx="minor">
+            <a:schemeClr val="lt1"/>
+          </a:fontRef>
+        </p:style>
+        <p:txBody>
+          <a:bodyPr rtlCol="0" anchor="ctr" wrap="square" lIns="45720" rIns="45720"/>
+          <a:lstStyle/>
+          <a:p>
+            <a:pPr algn="ctr"/>
+            <a:r>
+              <a:rPr sz="1400" b="1">
+                <a:solidFill>
+                  <a:srgbClr val="FFFFFF"/>
+                </a:solidFill>
+                <a:latin typeface="Meiryo UI"/>
+              </a:rPr>
+              <a:t>5</a:t>
+            </a:r>
+          </a:p>
+        </p:txBody>
+      </p:sp>
+      <p:sp>
+        <p:nvSpPr>
+          <p:cNvPr id="27" name="TextBox 26"/>
+          <p:cNvSpPr txBox="1"/>
+          <p:nvPr/>
+        </p:nvSpPr>
+        <p:spPr>
+          <a:xfrm>
+            <a:off x="6400800" y="4992624"/>
+            <a:ext cx="5303520" cy="365760"/>
+          </a:xfrm>
+          <a:prstGeom prst="rect">
+            <a:avLst/>
+          </a:prstGeom>
+          <a:noFill/>
+        </p:spPr>
+        <p:txBody>
+          <a:bodyPr wrap="square" anchor="t" lIns="45720" rIns="45720">
+            <a:spAutoFit/>
+          </a:bodyPr>
+          <a:lstStyle/>
+          <a:p>
+            <a:pPr algn="l">
+              <a:spcAft>
+                <a:spcPts val="600"/>
+              </a:spcAft>
+            </a:pPr>
+            <a:r>
+              <a:rPr sz="1600" b="1">
+                <a:solidFill>
+                  <a:srgbClr val="2A2A2A"/>
+                </a:solidFill>
+                <a:latin typeface="Meiryo UI"/>
+              </a:rPr>
+              <a:t>守りは続けて</a:t>
+            </a:r>
+          </a:p>
+        </p:txBody>
+      </p:sp>
+      <p:sp>
+        <p:nvSpPr>
+          <p:cNvPr id="28" name="TextBox 27"/>
+          <p:cNvSpPr txBox="1"/>
+          <p:nvPr/>
+        </p:nvSpPr>
+        <p:spPr>
+          <a:xfrm>
+            <a:off x="6400800" y="5340096"/>
+            <a:ext cx="5303520" cy="594360"/>
+          </a:xfrm>
+          <a:prstGeom prst="rect">
+            <a:avLst/>
+          </a:prstGeom>
+          <a:noFill/>
+        </p:spPr>
+        <p:txBody>
+          <a:bodyPr wrap="square" anchor="t" lIns="45720" rIns="45720">
+            <a:spAutoFit/>
+          </a:bodyPr>
+          <a:lstStyle/>
+          <a:p>
+            <a:pPr algn="l">
+              <a:spcAft>
+                <a:spcPts val="600"/>
+              </a:spcAft>
+            </a:pPr>
+            <a:r>
+              <a:rPr sz="1200" b="0">
+                <a:solidFill>
+                  <a:srgbClr val="666666"/>
+                </a:solidFill>
+                <a:latin typeface="Meiryo UI"/>
+              </a:rPr>
+              <a:t>お相手のご主人の無意識のやきもちで、エネルギーを持っていかれることも。寝る前のプロテクト（守り）を続けて</a:t>
+            </a:r>
+          </a:p>
+        </p:txBody>
+      </p:sp>
+      <p:sp>
+        <p:nvSpPr>
+          <p:cNvPr id="29" name="Rounded Rectangle 28"/>
+          <p:cNvSpPr/>
+          <p:nvPr/>
+        </p:nvSpPr>
+        <p:spPr>
+          <a:xfrm>
+            <a:off x="5897880" y="5989320"/>
+            <a:ext cx="5806440" cy="502920"/>
           </a:xfrm>
           <a:prstGeom prst="roundRect">
             <a:avLst/>

--- a/20_Projects/海音_心体の調律/タマラ/川越さん/20261014_ご縁と考え方_お食事の方.pptx
+++ b/20_Projects/海音_心体の調律/タマラ/川越さん/20261014_ご縁と考え方_お食事の方.pptx
@@ -3104,8 +3104,8 @@
         </p:nvSpPr>
         <p:spPr>
           <a:xfrm>
-            <a:off x="548640" y="320040"/>
-            <a:ext cx="11064240" cy="822960"/>
+            <a:off x="457200" y="228600"/>
+            <a:ext cx="11247120" cy="731520"/>
           </a:xfrm>
           <a:prstGeom prst="rect">
             <a:avLst/>
@@ -3124,7 +3124,7 @@
               </a:spcAft>
             </a:pPr>
             <a:r>
-              <a:rPr sz="3600" b="1">
+              <a:rPr sz="3200" b="1">
                 <a:solidFill>
                   <a:srgbClr val="2B2350"/>
                 </a:solidFill>
@@ -3143,8 +3143,8 @@
         </p:nvSpPr>
         <p:spPr>
           <a:xfrm>
-            <a:off x="548640" y="1051560"/>
-            <a:ext cx="11064240" cy="457200"/>
+            <a:off x="457200" y="868680"/>
+            <a:ext cx="11247120" cy="411480"/>
           </a:xfrm>
           <a:prstGeom prst="rect">
             <a:avLst/>
@@ -3163,7 +3163,7 @@
               </a:spcAft>
             </a:pPr>
             <a:r>
-              <a:rPr sz="1800" b="0">
+              <a:rPr sz="1600" b="0">
                 <a:solidFill>
                   <a:srgbClr val="666666"/>
                 </a:solidFill>
@@ -3182,8 +3182,8 @@
         </p:nvSpPr>
         <p:spPr>
           <a:xfrm>
-            <a:off x="457200" y="1600200"/>
-            <a:ext cx="5120640" cy="4892040"/>
+            <a:off x="457200" y="1417320"/>
+            <a:ext cx="4480560" cy="4572000"/>
           </a:xfrm>
           <a:prstGeom prst="roundRect">
             <a:avLst/>
@@ -3226,8 +3226,8 @@
         </p:nvSpPr>
         <p:spPr>
           <a:xfrm>
-            <a:off x="640080" y="1691640"/>
-            <a:ext cx="4754880" cy="457200"/>
+            <a:off x="640080" y="1508760"/>
+            <a:ext cx="4114800" cy="457200"/>
           </a:xfrm>
           <a:prstGeom prst="rect">
             <a:avLst/>
@@ -3246,7 +3246,7 @@
               </a:spcAft>
             </a:pPr>
             <a:r>
-              <a:rPr sz="2000" b="1">
+              <a:rPr sz="1800" b="1">
                 <a:solidFill>
                   <a:srgbClr val="2B2350"/>
                 </a:solidFill>
@@ -3265,8 +3265,8 @@
         </p:nvSpPr>
         <p:spPr>
           <a:xfrm>
-            <a:off x="1874519" y="2240280"/>
-            <a:ext cx="2286000" cy="777240"/>
+            <a:off x="1554480" y="2011680"/>
+            <a:ext cx="2286000" cy="731520"/>
           </a:xfrm>
           <a:prstGeom prst="roundRect">
             <a:avLst/>
@@ -3299,7 +3299,7 @@
           <a:p>
             <a:pPr algn="ctr"/>
             <a:r>
-              <a:rPr sz="1400" b="1">
+              <a:rPr sz="1300" b="1">
                 <a:solidFill>
                   <a:srgbClr val="FFFFFF"/>
                 </a:solidFill>
@@ -3311,7 +3311,7 @@
           <a:p>
             <a:pPr algn="ctr"/>
             <a:r>
-              <a:rPr sz="1400" b="1">
+              <a:rPr sz="1300" b="1">
                 <a:solidFill>
                   <a:srgbClr val="FFFFFF"/>
                 </a:solidFill>
@@ -3330,8 +3330,8 @@
         </p:nvCxnSpPr>
         <p:spPr>
           <a:xfrm flipH="1">
-            <a:off x="1600200" y="3035808"/>
-            <a:ext cx="868680" cy="484632"/>
+            <a:off x="1600200" y="2761488"/>
+            <a:ext cx="502920" cy="484632"/>
           </a:xfrm>
           <a:prstGeom prst="line">
             <a:avLst/>
@@ -3366,8 +3366,8 @@
         </p:nvCxnSpPr>
         <p:spPr>
           <a:xfrm>
-            <a:off x="3566160" y="3035808"/>
-            <a:ext cx="868680" cy="484632"/>
+            <a:off x="3291840" y="2761488"/>
+            <a:ext cx="502920" cy="484632"/>
           </a:xfrm>
           <a:prstGeom prst="line">
             <a:avLst/>
@@ -3402,8 +3402,8 @@
         </p:nvSpPr>
         <p:spPr>
           <a:xfrm>
-            <a:off x="640080" y="3566160"/>
-            <a:ext cx="2240280" cy="777240"/>
+            <a:off x="640080" y="3291840"/>
+            <a:ext cx="1965960" cy="685800"/>
           </a:xfrm>
           <a:prstGeom prst="roundRect">
             <a:avLst/>
@@ -3436,7 +3436,7 @@
           <a:p>
             <a:pPr algn="ctr"/>
             <a:r>
-              <a:rPr sz="1500" b="1">
+              <a:rPr sz="1400" b="1">
                 <a:solidFill>
                   <a:srgbClr val="FFFFFF"/>
                 </a:solidFill>
@@ -3455,8 +3455,8 @@
         </p:nvSpPr>
         <p:spPr>
           <a:xfrm>
-            <a:off x="640080" y="4389120"/>
-            <a:ext cx="2240280" cy="1463040"/>
+            <a:off x="640080" y="4069080"/>
+            <a:ext cx="1965960" cy="1737360"/>
           </a:xfrm>
           <a:prstGeom prst="rect">
             <a:avLst/>
@@ -3558,8 +3558,8 @@
         </p:nvSpPr>
         <p:spPr>
           <a:xfrm>
-            <a:off x="3154680" y="3566160"/>
-            <a:ext cx="2240280" cy="777240"/>
+            <a:off x="2788920" y="3291840"/>
+            <a:ext cx="1965960" cy="685800"/>
           </a:xfrm>
           <a:prstGeom prst="roundRect">
             <a:avLst/>
@@ -3592,7 +3592,7 @@
           <a:p>
             <a:pPr algn="ctr"/>
             <a:r>
-              <a:rPr sz="1500" b="1">
+              <a:rPr sz="1400" b="1">
                 <a:solidFill>
                   <a:srgbClr val="FFFFFF"/>
                 </a:solidFill>
@@ -3611,8 +3611,8 @@
         </p:nvSpPr>
         <p:spPr>
           <a:xfrm>
-            <a:off x="3154680" y="4389120"/>
-            <a:ext cx="2240280" cy="1463040"/>
+            <a:off x="2788920" y="4069080"/>
+            <a:ext cx="1965960" cy="1737360"/>
           </a:xfrm>
           <a:prstGeom prst="rect">
             <a:avLst/>
@@ -3714,8 +3714,8 @@
         </p:nvSpPr>
         <p:spPr>
           <a:xfrm>
-            <a:off x="5897880" y="1645920"/>
-            <a:ext cx="5852160" cy="457200"/>
+            <a:off x="5212080" y="1371600"/>
+            <a:ext cx="6583680" cy="411480"/>
           </a:xfrm>
           <a:prstGeom prst="rect">
             <a:avLst/>
@@ -3734,7 +3734,7 @@
               </a:spcAft>
             </a:pPr>
             <a:r>
-              <a:rPr sz="2000" b="1">
+              <a:rPr sz="1800" b="1">
                 <a:solidFill>
                   <a:srgbClr val="2B2350"/>
                 </a:solidFill>
@@ -3753,8 +3753,8 @@
         </p:nvSpPr>
         <p:spPr>
           <a:xfrm>
-            <a:off x="5897880" y="2103120"/>
-            <a:ext cx="384048" cy="384048"/>
+            <a:off x="5212080" y="1847088"/>
+            <a:ext cx="347472" cy="347472"/>
           </a:xfrm>
           <a:prstGeom prst="ellipse">
             <a:avLst/>
@@ -3787,7 +3787,7 @@
           <a:p>
             <a:pPr algn="ctr"/>
             <a:r>
-              <a:rPr sz="1400" b="1">
+              <a:rPr sz="1300" b="1">
                 <a:solidFill>
                   <a:srgbClr val="FFFFFF"/>
                 </a:solidFill>
@@ -3806,8 +3806,8 @@
         </p:nvSpPr>
         <p:spPr>
           <a:xfrm>
-            <a:off x="6400800" y="2029968"/>
-            <a:ext cx="5303520" cy="365760"/>
+            <a:off x="5669280" y="1783080"/>
+            <a:ext cx="6126480" cy="329184"/>
           </a:xfrm>
           <a:prstGeom prst="rect">
             <a:avLst/>
@@ -3826,7 +3826,7 @@
               </a:spcAft>
             </a:pPr>
             <a:r>
-              <a:rPr sz="1600" b="1">
+              <a:rPr sz="1500" b="1">
                 <a:solidFill>
                   <a:srgbClr val="2A2A2A"/>
                 </a:solidFill>
@@ -3845,8 +3845,8 @@
         </p:nvSpPr>
         <p:spPr>
           <a:xfrm>
-            <a:off x="6400800" y="2377440"/>
-            <a:ext cx="5303520" cy="594360"/>
+            <a:off x="5669280" y="2084831"/>
+            <a:ext cx="6126480" cy="329184"/>
           </a:xfrm>
           <a:prstGeom prst="rect">
             <a:avLst/>
@@ -3871,7 +3871,7 @@
                 </a:solidFill>
                 <a:latin typeface="Meiryo UI"/>
               </a:rPr>
-              <a:t>今世で一緒に出かけ、食事やお話を楽しんだことで、前世の思い残しは解消。彼女が結婚に踏み切れたのは「満足できた」から</a:t>
+              <a:t>一緒に出かけ、食事を楽しんだことで解消。彼女の結婚が「満足できた」しるし</a:t>
             </a:r>
           </a:p>
         </p:txBody>
@@ -3884,8 +3884,8 @@
         </p:nvSpPr>
         <p:spPr>
           <a:xfrm>
-            <a:off x="5897880" y="2843784"/>
-            <a:ext cx="384048" cy="384048"/>
+            <a:off x="5212080" y="2450592"/>
+            <a:ext cx="347472" cy="347472"/>
           </a:xfrm>
           <a:prstGeom prst="ellipse">
             <a:avLst/>
@@ -3918,7 +3918,7 @@
           <a:p>
             <a:pPr algn="ctr"/>
             <a:r>
-              <a:rPr sz="1400" b="1">
+              <a:rPr sz="1300" b="1">
                 <a:solidFill>
                   <a:srgbClr val="FFFFFF"/>
                 </a:solidFill>
@@ -3937,8 +3937,8 @@
         </p:nvSpPr>
         <p:spPr>
           <a:xfrm>
-            <a:off x="6400800" y="2770632"/>
-            <a:ext cx="5303520" cy="365760"/>
+            <a:off x="5669280" y="2386584"/>
+            <a:ext cx="6126480" cy="329184"/>
           </a:xfrm>
           <a:prstGeom prst="rect">
             <a:avLst/>
@@ -3957,7 +3957,7 @@
               </a:spcAft>
             </a:pPr>
             <a:r>
-              <a:rPr sz="1600" b="1">
+              <a:rPr sz="1500" b="1">
                 <a:solidFill>
                   <a:srgbClr val="2A2A2A"/>
                 </a:solidFill>
@@ -3976,8 +3976,8 @@
         </p:nvSpPr>
         <p:spPr>
           <a:xfrm>
-            <a:off x="6400800" y="3118104"/>
-            <a:ext cx="5303520" cy="594360"/>
+            <a:off x="5669280" y="2688336"/>
+            <a:ext cx="6126480" cy="329184"/>
           </a:xfrm>
           <a:prstGeom prst="rect">
             <a:avLst/>
@@ -4015,8 +4015,8 @@
         </p:nvSpPr>
         <p:spPr>
           <a:xfrm>
-            <a:off x="5897880" y="3584448"/>
-            <a:ext cx="384048" cy="384048"/>
+            <a:off x="5212080" y="3054096"/>
+            <a:ext cx="347472" cy="347472"/>
           </a:xfrm>
           <a:prstGeom prst="ellipse">
             <a:avLst/>
@@ -4049,7 +4049,7 @@
           <a:p>
             <a:pPr algn="ctr"/>
             <a:r>
-              <a:rPr sz="1400" b="1">
+              <a:rPr sz="1300" b="1">
                 <a:solidFill>
                   <a:srgbClr val="FFFFFF"/>
                 </a:solidFill>
@@ -4068,8 +4068,8 @@
         </p:nvSpPr>
         <p:spPr>
           <a:xfrm>
-            <a:off x="6400800" y="3511296"/>
-            <a:ext cx="5303520" cy="365760"/>
+            <a:off x="5669280" y="2990088"/>
+            <a:ext cx="6126480" cy="329184"/>
           </a:xfrm>
           <a:prstGeom prst="rect">
             <a:avLst/>
@@ -4088,7 +4088,7 @@
               </a:spcAft>
             </a:pPr>
             <a:r>
-              <a:rPr sz="1600" b="1">
+              <a:rPr sz="1500" b="1">
                 <a:solidFill>
                   <a:srgbClr val="2A2A2A"/>
                 </a:solidFill>
@@ -4107,8 +4107,8 @@
         </p:nvSpPr>
         <p:spPr>
           <a:xfrm>
-            <a:off x="6400800" y="3858768"/>
-            <a:ext cx="5303520" cy="594360"/>
+            <a:off x="5669280" y="3291839"/>
+            <a:ext cx="6126480" cy="329184"/>
           </a:xfrm>
           <a:prstGeom prst="rect">
             <a:avLst/>
@@ -4133,7 +4133,7 @@
                 </a:solidFill>
                 <a:latin typeface="Meiryo UI"/>
               </a:rPr>
-              <a:t>離れていくのを待つのではなく、「もう君も自由になりなさい」と川越さんから言ってあげられるか</a:t>
+              <a:t>「もう君も自由になりなさい」と、川越さんから言ってあげられるか</a:t>
             </a:r>
           </a:p>
         </p:txBody>
@@ -4146,8 +4146,8 @@
         </p:nvSpPr>
         <p:spPr>
           <a:xfrm>
-            <a:off x="5897880" y="4325112"/>
-            <a:ext cx="384048" cy="384048"/>
+            <a:off x="5212080" y="3657600"/>
+            <a:ext cx="347472" cy="347472"/>
           </a:xfrm>
           <a:prstGeom prst="ellipse">
             <a:avLst/>
@@ -4180,7 +4180,7 @@
           <a:p>
             <a:pPr algn="ctr"/>
             <a:r>
-              <a:rPr sz="1400" b="1">
+              <a:rPr sz="1300" b="1">
                 <a:solidFill>
                   <a:srgbClr val="FFFFFF"/>
                 </a:solidFill>
@@ -4199,8 +4199,8 @@
         </p:nvSpPr>
         <p:spPr>
           <a:xfrm>
-            <a:off x="6400800" y="4251960"/>
-            <a:ext cx="5303520" cy="365760"/>
+            <a:off x="5669280" y="3593592"/>
+            <a:ext cx="6126480" cy="329184"/>
           </a:xfrm>
           <a:prstGeom prst="rect">
             <a:avLst/>
@@ -4219,7 +4219,7 @@
               </a:spcAft>
             </a:pPr>
             <a:r>
-              <a:rPr sz="1600" b="1">
+              <a:rPr sz="1500" b="1">
                 <a:solidFill>
                   <a:srgbClr val="2A2A2A"/>
                 </a:solidFill>
@@ -4238,8 +4238,8 @@
         </p:nvSpPr>
         <p:spPr>
           <a:xfrm>
-            <a:off x="6400800" y="4599432"/>
-            <a:ext cx="5303520" cy="594360"/>
+            <a:off x="5669280" y="3895344"/>
+            <a:ext cx="6126480" cy="329184"/>
           </a:xfrm>
           <a:prstGeom prst="rect">
             <a:avLst/>
@@ -4264,7 +4264,7 @@
                 </a:solidFill>
                 <a:latin typeface="Meiryo UI"/>
               </a:rPr>
-              <a:t>これ以上近づくと、彼女が今のご主人に罪悪感を抱えることに。法律や今の暮らしの中で考える必要があります</a:t>
+              <a:t>これ以上近づくと、彼女が今のご主人への罪悪感を抱えることに。法律の面も考えて</a:t>
             </a:r>
           </a:p>
         </p:txBody>
@@ -4277,14 +4277,14 @@
         </p:nvSpPr>
         <p:spPr>
           <a:xfrm>
-            <a:off x="5897880" y="5065776"/>
-            <a:ext cx="384048" cy="384048"/>
+            <a:off x="5212080" y="4261104"/>
+            <a:ext cx="347472" cy="347472"/>
           </a:xfrm>
           <a:prstGeom prst="ellipse">
             <a:avLst/>
           </a:prstGeom>
           <a:solidFill>
-            <a:srgbClr val="C9973A"/>
+            <a:srgbClr val="D9443B"/>
           </a:solidFill>
           <a:ln>
             <a:noFill/>
@@ -4311,7 +4311,7 @@
           <a:p>
             <a:pPr algn="ctr"/>
             <a:r>
-              <a:rPr sz="1400" b="1">
+              <a:rPr sz="1300" b="1">
                 <a:solidFill>
                   <a:srgbClr val="FFFFFF"/>
                 </a:solidFill>
@@ -4330,8 +4330,8 @@
         </p:nvSpPr>
         <p:spPr>
           <a:xfrm>
-            <a:off x="6400800" y="4992624"/>
-            <a:ext cx="5303520" cy="365760"/>
+            <a:off x="5669280" y="4197096"/>
+            <a:ext cx="6126480" cy="329184"/>
           </a:xfrm>
           <a:prstGeom prst="rect">
             <a:avLst/>
@@ -4350,13 +4350,13 @@
               </a:spcAft>
             </a:pPr>
             <a:r>
-              <a:rPr sz="1600" b="1">
-                <a:solidFill>
-                  <a:srgbClr val="2A2A2A"/>
+              <a:rPr sz="1500" b="1">
+                <a:solidFill>
+                  <a:srgbClr val="D9443B"/>
                 </a:solidFill>
                 <a:latin typeface="Meiryo UI"/>
               </a:rPr>
-              <a:t>守りは続けて</a:t>
+              <a:t>今以上を願うと、跳ね返りが来ることも</a:t>
             </a:r>
           </a:p>
         </p:txBody>
@@ -4369,8 +4369,8 @@
         </p:nvSpPr>
         <p:spPr>
           <a:xfrm>
-            <a:off x="6400800" y="5340096"/>
-            <a:ext cx="5303520" cy="594360"/>
+            <a:off x="5669280" y="4498848"/>
+            <a:ext cx="6126480" cy="329184"/>
           </a:xfrm>
           <a:prstGeom prst="rect">
             <a:avLst/>
@@ -4395,27 +4395,27 @@
                 </a:solidFill>
                 <a:latin typeface="Meiryo UI"/>
               </a:rPr>
-              <a:t>お相手のご主人の無意識のやきもちで、エネルギーを持っていかれることも。寝る前のプロテクト（守り）を続けて</a:t>
-            </a:r>
-          </a:p>
-        </p:txBody>
-      </p:sp>
-      <p:sp>
-        <p:nvSpPr>
-          <p:cNvPr id="29" name="Rounded Rectangle 28"/>
+              <a:t>その思いのエネルギーは、川越さんの体に返ってくる可能性があります</a:t>
+            </a:r>
+          </a:p>
+        </p:txBody>
+      </p:sp>
+      <p:sp>
+        <p:nvSpPr>
+          <p:cNvPr id="29" name="Oval 28"/>
           <p:cNvSpPr/>
           <p:nvPr/>
         </p:nvSpPr>
         <p:spPr>
           <a:xfrm>
-            <a:off x="5897880" y="5989320"/>
-            <a:ext cx="5806440" cy="502920"/>
-          </a:xfrm>
-          <a:prstGeom prst="roundRect">
+            <a:off x="5212080" y="4864608"/>
+            <a:ext cx="347472" cy="347472"/>
+          </a:xfrm>
+          <a:prstGeom prst="ellipse">
             <a:avLst/>
           </a:prstGeom>
           <a:solidFill>
-            <a:srgbClr val="FBF4E6"/>
+            <a:srgbClr val="D9443B"/>
           </a:solidFill>
           <a:ln>
             <a:noFill/>
@@ -4442,7 +4442,269 @@
           <a:p>
             <a:pPr algn="ctr"/>
             <a:r>
+              <a:rPr sz="1300" b="1">
+                <a:solidFill>
+                  <a:srgbClr val="FFFFFF"/>
+                </a:solidFill>
+                <a:latin typeface="Meiryo UI"/>
+              </a:rPr>
+              <a:t>6</a:t>
+            </a:r>
+          </a:p>
+        </p:txBody>
+      </p:sp>
+      <p:sp>
+        <p:nvSpPr>
+          <p:cNvPr id="30" name="TextBox 29"/>
+          <p:cNvSpPr txBox="1"/>
+          <p:nvPr/>
+        </p:nvSpPr>
+        <p:spPr>
+          <a:xfrm>
+            <a:off x="5669280" y="4800600"/>
+            <a:ext cx="6126480" cy="329184"/>
+          </a:xfrm>
+          <a:prstGeom prst="rect">
+            <a:avLst/>
+          </a:prstGeom>
+          <a:noFill/>
+        </p:spPr>
+        <p:txBody>
+          <a:bodyPr wrap="square" anchor="t" lIns="45720" rIns="45720">
+            <a:spAutoFit/>
+          </a:bodyPr>
+          <a:lstStyle/>
+          <a:p>
+            <a:pPr algn="l">
+              <a:spcAft>
+                <a:spcPts val="600"/>
+              </a:spcAft>
+            </a:pPr>
+            <a:r>
               <a:rPr sz="1500" b="1">
+                <a:solidFill>
+                  <a:srgbClr val="D9443B"/>
+                </a:solidFill>
+                <a:latin typeface="Meiryo UI"/>
+              </a:rPr>
+              <a:t>来世に、新しいカルマのタネをつくることに</a:t>
+            </a:r>
+          </a:p>
+        </p:txBody>
+      </p:sp>
+      <p:sp>
+        <p:nvSpPr>
+          <p:cNvPr id="31" name="TextBox 30"/>
+          <p:cNvSpPr txBox="1"/>
+          <p:nvPr/>
+        </p:nvSpPr>
+        <p:spPr>
+          <a:xfrm>
+            <a:off x="5669280" y="5102352"/>
+            <a:ext cx="6126480" cy="329184"/>
+          </a:xfrm>
+          <a:prstGeom prst="rect">
+            <a:avLst/>
+          </a:prstGeom>
+          <a:noFill/>
+        </p:spPr>
+        <p:txBody>
+          <a:bodyPr wrap="square" anchor="t" lIns="45720" rIns="45720">
+            <a:spAutoFit/>
+          </a:bodyPr>
+          <a:lstStyle/>
+          <a:p>
+            <a:pPr algn="l">
+              <a:spcAft>
+                <a:spcPts val="600"/>
+              </a:spcAft>
+            </a:pPr>
+            <a:r>
+              <a:rPr sz="1200" b="0">
+                <a:solidFill>
+                  <a:srgbClr val="666666"/>
+                </a:solidFill>
+                <a:latin typeface="Meiryo UI"/>
+              </a:rPr>
+              <a:t>今世で終わらせられるご縁を、また来世へ持ち越すことになります</a:t>
+            </a:r>
+          </a:p>
+        </p:txBody>
+      </p:sp>
+      <p:sp>
+        <p:nvSpPr>
+          <p:cNvPr id="32" name="Oval 31"/>
+          <p:cNvSpPr/>
+          <p:nvPr/>
+        </p:nvSpPr>
+        <p:spPr>
+          <a:xfrm>
+            <a:off x="5212080" y="5468112"/>
+            <a:ext cx="347472" cy="347472"/>
+          </a:xfrm>
+          <a:prstGeom prst="ellipse">
+            <a:avLst/>
+          </a:prstGeom>
+          <a:solidFill>
+            <a:srgbClr val="C9973A"/>
+          </a:solidFill>
+          <a:ln>
+            <a:noFill/>
+          </a:ln>
+          <a:effectLst/>
+        </p:spPr>
+        <p:style>
+          <a:lnRef idx="1">
+            <a:schemeClr val="accent1"/>
+          </a:lnRef>
+          <a:fillRef idx="3">
+            <a:schemeClr val="accent1"/>
+          </a:fillRef>
+          <a:effectRef idx="2">
+            <a:schemeClr val="accent1"/>
+          </a:effectRef>
+          <a:fontRef idx="minor">
+            <a:schemeClr val="lt1"/>
+          </a:fontRef>
+        </p:style>
+        <p:txBody>
+          <a:bodyPr rtlCol="0" anchor="ctr" wrap="square" lIns="45720" rIns="45720"/>
+          <a:lstStyle/>
+          <a:p>
+            <a:pPr algn="ctr"/>
+            <a:r>
+              <a:rPr sz="1300" b="1">
+                <a:solidFill>
+                  <a:srgbClr val="FFFFFF"/>
+                </a:solidFill>
+                <a:latin typeface="Meiryo UI"/>
+              </a:rPr>
+              <a:t>7</a:t>
+            </a:r>
+          </a:p>
+        </p:txBody>
+      </p:sp>
+      <p:sp>
+        <p:nvSpPr>
+          <p:cNvPr id="33" name="TextBox 32"/>
+          <p:cNvSpPr txBox="1"/>
+          <p:nvPr/>
+        </p:nvSpPr>
+        <p:spPr>
+          <a:xfrm>
+            <a:off x="5669280" y="5404103"/>
+            <a:ext cx="6126480" cy="329184"/>
+          </a:xfrm>
+          <a:prstGeom prst="rect">
+            <a:avLst/>
+          </a:prstGeom>
+          <a:noFill/>
+        </p:spPr>
+        <p:txBody>
+          <a:bodyPr wrap="square" anchor="t" lIns="45720" rIns="45720">
+            <a:spAutoFit/>
+          </a:bodyPr>
+          <a:lstStyle/>
+          <a:p>
+            <a:pPr algn="l">
+              <a:spcAft>
+                <a:spcPts val="600"/>
+              </a:spcAft>
+            </a:pPr>
+            <a:r>
+              <a:rPr sz="1500" b="1">
+                <a:solidFill>
+                  <a:srgbClr val="2A2A2A"/>
+                </a:solidFill>
+                <a:latin typeface="Meiryo UI"/>
+              </a:rPr>
+              <a:t>エネルギーはやさしく送る・守りは続ける</a:t>
+            </a:r>
+          </a:p>
+        </p:txBody>
+      </p:sp>
+      <p:sp>
+        <p:nvSpPr>
+          <p:cNvPr id="34" name="TextBox 33"/>
+          <p:cNvSpPr txBox="1"/>
+          <p:nvPr/>
+        </p:nvSpPr>
+        <p:spPr>
+          <a:xfrm>
+            <a:off x="5669280" y="5705855"/>
+            <a:ext cx="6126480" cy="329184"/>
+          </a:xfrm>
+          <a:prstGeom prst="rect">
+            <a:avLst/>
+          </a:prstGeom>
+          <a:noFill/>
+        </p:spPr>
+        <p:txBody>
+          <a:bodyPr wrap="square" anchor="t" lIns="45720" rIns="45720">
+            <a:spAutoFit/>
+          </a:bodyPr>
+          <a:lstStyle/>
+          <a:p>
+            <a:pPr algn="l">
+              <a:spcAft>
+                <a:spcPts val="600"/>
+              </a:spcAft>
+            </a:pPr>
+            <a:r>
+              <a:rPr sz="1200" b="0">
+                <a:solidFill>
+                  <a:srgbClr val="666666"/>
+                </a:solidFill>
+                <a:latin typeface="Meiryo UI"/>
+              </a:rPr>
+              <a:t>「思い通りに」を乗せると相手には強い圧に。ご主人のやきもちには寝る前のプロテクトを</a:t>
+            </a:r>
+          </a:p>
+        </p:txBody>
+      </p:sp>
+      <p:sp>
+        <p:nvSpPr>
+          <p:cNvPr id="35" name="Rounded Rectangle 34"/>
+          <p:cNvSpPr/>
+          <p:nvPr/>
+        </p:nvSpPr>
+        <p:spPr>
+          <a:xfrm>
+            <a:off x="457200" y="6172200"/>
+            <a:ext cx="11274552" cy="502920"/>
+          </a:xfrm>
+          <a:prstGeom prst="roundRect">
+            <a:avLst/>
+          </a:prstGeom>
+          <a:solidFill>
+            <a:srgbClr val="FBF4E6"/>
+          </a:solidFill>
+          <a:ln>
+            <a:noFill/>
+          </a:ln>
+          <a:effectLst/>
+        </p:spPr>
+        <p:style>
+          <a:lnRef idx="1">
+            <a:schemeClr val="accent1"/>
+          </a:lnRef>
+          <a:fillRef idx="3">
+            <a:schemeClr val="accent1"/>
+          </a:fillRef>
+          <a:effectRef idx="2">
+            <a:schemeClr val="accent1"/>
+          </a:effectRef>
+          <a:fontRef idx="minor">
+            <a:schemeClr val="lt1"/>
+          </a:fontRef>
+        </p:style>
+        <p:txBody>
+          <a:bodyPr rtlCol="0" anchor="ctr" wrap="square" lIns="45720" rIns="45720"/>
+          <a:lstStyle/>
+          <a:p>
+            <a:pPr algn="ctr"/>
+            <a:r>
+              <a:rPr sz="1600" b="1">
                 <a:solidFill>
                   <a:srgbClr val="2B2350"/>
                 </a:solidFill>

--- a/20_Projects/海音_心体の調律/タマラ/川越さん/20261014_ご縁と考え方_お食事の方.pptx
+++ b/20_Projects/海音_心体の調律/タマラ/川越さん/20261014_ご縁と考え方_お食事の方.pptx
@@ -4356,7 +4356,7 @@
                 </a:solidFill>
                 <a:latin typeface="Meiryo UI"/>
               </a:rPr>
-              <a:t>今以上を願うと、跳ね返りが来ることも</a:t>
+              <a:t>今以上を願うと、彼女の家庭を壊しかねません</a:t>
             </a:r>
           </a:p>
         </p:txBody>
@@ -4395,7 +4395,7 @@
                 </a:solidFill>
                 <a:latin typeface="Meiryo UI"/>
               </a:rPr>
-              <a:t>その思いのエネルギーは、川越さんの体に返ってくる可能性があります</a:t>
+              <a:t>家庭が揺らげば新しい恨みが生まれ、それが川越さんの体に返ってくる可能性があります</a:t>
             </a:r>
           </a:p>
         </p:txBody>

--- a/20_Projects/海音_心体の調律/タマラ/川越さん/20261014_ご縁と考え方_お食事の方.pptx
+++ b/20_Projects/海音_心体の調律/タマラ/川越さん/20261014_ご縁と考え方_お食事の方.pptx
@@ -3183,7 +3183,7 @@
         <p:spPr>
           <a:xfrm>
             <a:off x="457200" y="1417320"/>
-            <a:ext cx="4480560" cy="4572000"/>
+            <a:ext cx="4480560" cy="4343400"/>
           </a:xfrm>
           <a:prstGeom prst="roundRect">
             <a:avLst/>
@@ -3884,7 +3884,7 @@
         </p:nvSpPr>
         <p:spPr>
           <a:xfrm>
-            <a:off x="5212080" y="2450592"/>
+            <a:off x="5212080" y="2414016"/>
             <a:ext cx="347472" cy="347472"/>
           </a:xfrm>
           <a:prstGeom prst="ellipse">
@@ -3937,7 +3937,7 @@
         </p:nvSpPr>
         <p:spPr>
           <a:xfrm>
-            <a:off x="5669280" y="2386584"/>
+            <a:off x="5669280" y="2350008"/>
             <a:ext cx="6126480" cy="329184"/>
           </a:xfrm>
           <a:prstGeom prst="rect">
@@ -3976,7 +3976,7 @@
         </p:nvSpPr>
         <p:spPr>
           <a:xfrm>
-            <a:off x="5669280" y="2688336"/>
+            <a:off x="5669280" y="2651760"/>
             <a:ext cx="6126480" cy="329184"/>
           </a:xfrm>
           <a:prstGeom prst="rect">
@@ -4015,7 +4015,7 @@
         </p:nvSpPr>
         <p:spPr>
           <a:xfrm>
-            <a:off x="5212080" y="3054096"/>
+            <a:off x="5212080" y="2980944"/>
             <a:ext cx="347472" cy="347472"/>
           </a:xfrm>
           <a:prstGeom prst="ellipse">
@@ -4068,7 +4068,7 @@
         </p:nvSpPr>
         <p:spPr>
           <a:xfrm>
-            <a:off x="5669280" y="2990088"/>
+            <a:off x="5669280" y="2916936"/>
             <a:ext cx="6126480" cy="329184"/>
           </a:xfrm>
           <a:prstGeom prst="rect">
@@ -4094,7 +4094,7 @@
                 </a:solidFill>
                 <a:latin typeface="Meiryo UI"/>
               </a:rPr>
-              <a:t>手放してあげるのが、これからの課題</a:t>
+              <a:t>心の器を育てる：手放すか、来世につなぐか</a:t>
             </a:r>
           </a:p>
         </p:txBody>
@@ -4107,7 +4107,7 @@
         </p:nvSpPr>
         <p:spPr>
           <a:xfrm>
-            <a:off x="5669280" y="3291839"/>
+            <a:off x="5669280" y="3218687"/>
             <a:ext cx="6126480" cy="329184"/>
           </a:xfrm>
           <a:prstGeom prst="rect">
@@ -4133,7 +4133,7 @@
                 </a:solidFill>
                 <a:latin typeface="Meiryo UI"/>
               </a:rPr>
-              <a:t>「もう君も自由になりなさい」と、川越さんから言ってあげられるか</a:t>
+              <a:t>どちらを選んでも、今関係を深めることが彼女を傷つけないか、考えてみて</a:t>
             </a:r>
           </a:p>
         </p:txBody>
@@ -4146,7 +4146,7 @@
         </p:nvSpPr>
         <p:spPr>
           <a:xfrm>
-            <a:off x="5212080" y="3657600"/>
+            <a:off x="5212080" y="3547872"/>
             <a:ext cx="347472" cy="347472"/>
           </a:xfrm>
           <a:prstGeom prst="ellipse">
@@ -4199,7 +4199,7 @@
         </p:nvSpPr>
         <p:spPr>
           <a:xfrm>
-            <a:off x="5669280" y="3593592"/>
+            <a:off x="5669280" y="3483864"/>
             <a:ext cx="6126480" cy="329184"/>
           </a:xfrm>
           <a:prstGeom prst="rect">
@@ -4238,7 +4238,7 @@
         </p:nvSpPr>
         <p:spPr>
           <a:xfrm>
-            <a:off x="5669280" y="3895344"/>
+            <a:off x="5669280" y="3785615"/>
             <a:ext cx="6126480" cy="329184"/>
           </a:xfrm>
           <a:prstGeom prst="rect">
@@ -4277,7 +4277,7 @@
         </p:nvSpPr>
         <p:spPr>
           <a:xfrm>
-            <a:off x="5212080" y="4261104"/>
+            <a:off x="5212080" y="4114800"/>
             <a:ext cx="347472" cy="347472"/>
           </a:xfrm>
           <a:prstGeom prst="ellipse">
@@ -4330,7 +4330,7 @@
         </p:nvSpPr>
         <p:spPr>
           <a:xfrm>
-            <a:off x="5669280" y="4197096"/>
+            <a:off x="5669280" y="4050791"/>
             <a:ext cx="6126480" cy="329184"/>
           </a:xfrm>
           <a:prstGeom prst="rect">
@@ -4369,7 +4369,7 @@
         </p:nvSpPr>
         <p:spPr>
           <a:xfrm>
-            <a:off x="5669280" y="4498848"/>
+            <a:off x="5669280" y="4352544"/>
             <a:ext cx="6126480" cy="329184"/>
           </a:xfrm>
           <a:prstGeom prst="rect">
@@ -4408,7 +4408,7 @@
         </p:nvSpPr>
         <p:spPr>
           <a:xfrm>
-            <a:off x="5212080" y="4864608"/>
+            <a:off x="5212080" y="4681728"/>
             <a:ext cx="347472" cy="347472"/>
           </a:xfrm>
           <a:prstGeom prst="ellipse">
@@ -4461,7 +4461,7 @@
         </p:nvSpPr>
         <p:spPr>
           <a:xfrm>
-            <a:off x="5669280" y="4800600"/>
+            <a:off x="5669280" y="4617720"/>
             <a:ext cx="6126480" cy="329184"/>
           </a:xfrm>
           <a:prstGeom prst="rect">
@@ -4500,7 +4500,7 @@
         </p:nvSpPr>
         <p:spPr>
           <a:xfrm>
-            <a:off x="5669280" y="5102352"/>
+            <a:off x="5669280" y="4919472"/>
             <a:ext cx="6126480" cy="329184"/>
           </a:xfrm>
           <a:prstGeom prst="rect">
@@ -4539,7 +4539,7 @@
         </p:nvSpPr>
         <p:spPr>
           <a:xfrm>
-            <a:off x="5212080" y="5468112"/>
+            <a:off x="5212080" y="5248655"/>
             <a:ext cx="347472" cy="347472"/>
           </a:xfrm>
           <a:prstGeom prst="ellipse">
@@ -4592,7 +4592,7 @@
         </p:nvSpPr>
         <p:spPr>
           <a:xfrm>
-            <a:off x="5669280" y="5404103"/>
+            <a:off x="5669280" y="5184647"/>
             <a:ext cx="6126480" cy="329184"/>
           </a:xfrm>
           <a:prstGeom prst="rect">
@@ -4631,7 +4631,7 @@
         </p:nvSpPr>
         <p:spPr>
           <a:xfrm>
-            <a:off x="5669280" y="5705855"/>
+            <a:off x="5669280" y="5486399"/>
             <a:ext cx="6126480" cy="329184"/>
           </a:xfrm>
           <a:prstGeom prst="rect">
@@ -4670,8 +4670,8 @@
         </p:nvSpPr>
         <p:spPr>
           <a:xfrm>
-            <a:off x="457200" y="6172200"/>
-            <a:ext cx="11274552" cy="502920"/>
+            <a:off x="457200" y="5852160"/>
+            <a:ext cx="11274552" cy="914400"/>
           </a:xfrm>
           <a:prstGeom prst="roundRect">
             <a:avLst/>
@@ -4704,13 +4704,37 @@
           <a:p>
             <a:pPr algn="ctr"/>
             <a:r>
-              <a:rPr sz="1600" b="1">
+              <a:rPr sz="1400" b="1">
                 <a:solidFill>
                   <a:srgbClr val="2B2350"/>
                 </a:solidFill>
                 <a:latin typeface="Meiryo UI"/>
               </a:rPr>
-              <a:t>ご縁を来世へつなぐか、今世で一段落にするかは、川越さんが決めること</a:t>
+              <a:t>関係を深めることは、できるのかもしれません。</a:t>
+            </a:r>
+          </a:p>
+          <a:p>
+            <a:pPr algn="ctr"/>
+            <a:r>
+              <a:rPr sz="1400" b="1">
+                <a:solidFill>
+                  <a:srgbClr val="2B2350"/>
+                </a:solidFill>
+                <a:latin typeface="Meiryo UI"/>
+              </a:rPr>
+              <a:t>でもそれは、今、身の回りを実際に支えてくれている人たちが離れていくことと、同じ意味かもしれません。</a:t>
+            </a:r>
+          </a:p>
+          <a:p>
+            <a:pPr algn="ctr"/>
+            <a:r>
+              <a:rPr sz="1400" b="1">
+                <a:solidFill>
+                  <a:srgbClr val="2B2350"/>
+                </a:solidFill>
+                <a:latin typeface="Meiryo UI"/>
+              </a:rPr>
+              <a:t>それを知った上で、どうするかを決めるのは川越さんです。</a:t>
             </a:r>
           </a:p>
         </p:txBody>

--- a/20_Projects/海音_心体の調律/タマラ/川越さん/20261014_ご縁と考え方_お食事の方.pptx
+++ b/20_Projects/海音_心体の調律/タマラ/川越さん/20261014_ご縁と考え方_お食事の方.pptx
@@ -3130,7 +3130,7 @@
                 </a:solidFill>
                 <a:latin typeface="Meiryo UI"/>
               </a:rPr>
-              <a:t>お食事に行く方とのご縁と、これからの考え方</a:t>
+              <a:t>お食事に行く方とのご縁と、これからの道</a:t>
             </a:r>
           </a:p>
         </p:txBody>
@@ -3708,970 +3708,14 @@
       </p:sp>
       <p:sp>
         <p:nvSpPr>
-          <p:cNvPr id="13" name="TextBox 12"/>
-          <p:cNvSpPr txBox="1"/>
+          <p:cNvPr id="13" name="Rounded Rectangle 12"/>
+          <p:cNvSpPr/>
           <p:nvPr/>
         </p:nvSpPr>
         <p:spPr>
           <a:xfrm>
-            <a:off x="5212080" y="1371600"/>
-            <a:ext cx="6583680" cy="411480"/>
-          </a:xfrm>
-          <a:prstGeom prst="rect">
-            <a:avLst/>
-          </a:prstGeom>
-          <a:noFill/>
-        </p:spPr>
-        <p:txBody>
-          <a:bodyPr wrap="square" anchor="t" lIns="45720" rIns="45720">
-            <a:spAutoFit/>
-          </a:bodyPr>
-          <a:lstStyle/>
-          <a:p>
-            <a:pPr algn="l">
-              <a:spcAft>
-                <a:spcPts val="600"/>
-              </a:spcAft>
-            </a:pPr>
-            <a:r>
-              <a:rPr sz="1800" b="1">
-                <a:solidFill>
-                  <a:srgbClr val="2B2350"/>
-                </a:solidFill>
-                <a:latin typeface="Meiryo UI"/>
-              </a:rPr>
-              <a:t>ここからの考え方</a:t>
-            </a:r>
-          </a:p>
-        </p:txBody>
-      </p:sp>
-      <p:sp>
-        <p:nvSpPr>
-          <p:cNvPr id="14" name="Oval 13"/>
-          <p:cNvSpPr/>
-          <p:nvPr/>
-        </p:nvSpPr>
-        <p:spPr>
-          <a:xfrm>
-            <a:off x="5212080" y="1847088"/>
-            <a:ext cx="347472" cy="347472"/>
-          </a:xfrm>
-          <a:prstGeom prst="ellipse">
-            <a:avLst/>
-          </a:prstGeom>
-          <a:solidFill>
-            <a:srgbClr val="C9973A"/>
-          </a:solidFill>
-          <a:ln>
-            <a:noFill/>
-          </a:ln>
-          <a:effectLst/>
-        </p:spPr>
-        <p:style>
-          <a:lnRef idx="1">
-            <a:schemeClr val="accent1"/>
-          </a:lnRef>
-          <a:fillRef idx="3">
-            <a:schemeClr val="accent1"/>
-          </a:fillRef>
-          <a:effectRef idx="2">
-            <a:schemeClr val="accent1"/>
-          </a:effectRef>
-          <a:fontRef idx="minor">
-            <a:schemeClr val="lt1"/>
-          </a:fontRef>
-        </p:style>
-        <p:txBody>
-          <a:bodyPr rtlCol="0" anchor="ctr" wrap="square" lIns="45720" rIns="45720"/>
-          <a:lstStyle/>
-          <a:p>
-            <a:pPr algn="ctr"/>
-            <a:r>
-              <a:rPr sz="1300" b="1">
-                <a:solidFill>
-                  <a:srgbClr val="FFFFFF"/>
-                </a:solidFill>
-                <a:latin typeface="Meiryo UI"/>
-              </a:rPr>
-              <a:t>1</a:t>
-            </a:r>
-          </a:p>
-        </p:txBody>
-      </p:sp>
-      <p:sp>
-        <p:nvSpPr>
-          <p:cNvPr id="15" name="TextBox 14"/>
-          <p:cNvSpPr txBox="1"/>
-          <p:nvPr/>
-        </p:nvSpPr>
-        <p:spPr>
-          <a:xfrm>
-            <a:off x="5669280" y="1783080"/>
-            <a:ext cx="6126480" cy="329184"/>
-          </a:xfrm>
-          <a:prstGeom prst="rect">
-            <a:avLst/>
-          </a:prstGeom>
-          <a:noFill/>
-        </p:spPr>
-        <p:txBody>
-          <a:bodyPr wrap="square" anchor="t" lIns="45720" rIns="45720">
-            <a:spAutoFit/>
-          </a:bodyPr>
-          <a:lstStyle/>
-          <a:p>
-            <a:pPr algn="l">
-              <a:spcAft>
-                <a:spcPts val="600"/>
-              </a:spcAft>
-            </a:pPr>
-            <a:r>
-              <a:rPr sz="1500" b="1">
-                <a:solidFill>
-                  <a:srgbClr val="2A2A2A"/>
-                </a:solidFill>
-                <a:latin typeface="Meiryo UI"/>
-              </a:rPr>
-              <a:t>罪滅ぼしは、もう終わっています</a:t>
-            </a:r>
-          </a:p>
-        </p:txBody>
-      </p:sp>
-      <p:sp>
-        <p:nvSpPr>
-          <p:cNvPr id="16" name="TextBox 15"/>
-          <p:cNvSpPr txBox="1"/>
-          <p:nvPr/>
-        </p:nvSpPr>
-        <p:spPr>
-          <a:xfrm>
-            <a:off x="5669280" y="2084831"/>
-            <a:ext cx="6126480" cy="329184"/>
-          </a:xfrm>
-          <a:prstGeom prst="rect">
-            <a:avLst/>
-          </a:prstGeom>
-          <a:noFill/>
-        </p:spPr>
-        <p:txBody>
-          <a:bodyPr wrap="square" anchor="t" lIns="45720" rIns="45720">
-            <a:spAutoFit/>
-          </a:bodyPr>
-          <a:lstStyle/>
-          <a:p>
-            <a:pPr algn="l">
-              <a:spcAft>
-                <a:spcPts val="600"/>
-              </a:spcAft>
-            </a:pPr>
-            <a:r>
-              <a:rPr sz="1200" b="0">
-                <a:solidFill>
-                  <a:srgbClr val="666666"/>
-                </a:solidFill>
-                <a:latin typeface="Meiryo UI"/>
-              </a:rPr>
-              <a:t>一緒に出かけ、食事を楽しんだことで解消。彼女の結婚が「満足できた」しるし</a:t>
-            </a:r>
-          </a:p>
-        </p:txBody>
-      </p:sp>
-      <p:sp>
-        <p:nvSpPr>
-          <p:cNvPr id="17" name="Oval 16"/>
-          <p:cNvSpPr/>
-          <p:nvPr/>
-        </p:nvSpPr>
-        <p:spPr>
-          <a:xfrm>
-            <a:off x="5212080" y="2414016"/>
-            <a:ext cx="347472" cy="347472"/>
-          </a:xfrm>
-          <a:prstGeom prst="ellipse">
-            <a:avLst/>
-          </a:prstGeom>
-          <a:solidFill>
-            <a:srgbClr val="C9973A"/>
-          </a:solidFill>
-          <a:ln>
-            <a:noFill/>
-          </a:ln>
-          <a:effectLst/>
-        </p:spPr>
-        <p:style>
-          <a:lnRef idx="1">
-            <a:schemeClr val="accent1"/>
-          </a:lnRef>
-          <a:fillRef idx="3">
-            <a:schemeClr val="accent1"/>
-          </a:fillRef>
-          <a:effectRef idx="2">
-            <a:schemeClr val="accent1"/>
-          </a:effectRef>
-          <a:fontRef idx="minor">
-            <a:schemeClr val="lt1"/>
-          </a:fontRef>
-        </p:style>
-        <p:txBody>
-          <a:bodyPr rtlCol="0" anchor="ctr" wrap="square" lIns="45720" rIns="45720"/>
-          <a:lstStyle/>
-          <a:p>
-            <a:pPr algn="ctr"/>
-            <a:r>
-              <a:rPr sz="1300" b="1">
-                <a:solidFill>
-                  <a:srgbClr val="FFFFFF"/>
-                </a:solidFill>
-                <a:latin typeface="Meiryo UI"/>
-              </a:rPr>
-              <a:t>2</a:t>
-            </a:r>
-          </a:p>
-        </p:txBody>
-      </p:sp>
-      <p:sp>
-        <p:nvSpPr>
-          <p:cNvPr id="18" name="TextBox 17"/>
-          <p:cNvSpPr txBox="1"/>
-          <p:nvPr/>
-        </p:nvSpPr>
-        <p:spPr>
-          <a:xfrm>
-            <a:off x="5669280" y="2350008"/>
-            <a:ext cx="6126480" cy="329184"/>
-          </a:xfrm>
-          <a:prstGeom prst="rect">
-            <a:avLst/>
-          </a:prstGeom>
-          <a:noFill/>
-        </p:spPr>
-        <p:txBody>
-          <a:bodyPr wrap="square" anchor="t" lIns="45720" rIns="45720">
-            <a:spAutoFit/>
-          </a:bodyPr>
-          <a:lstStyle/>
-          <a:p>
-            <a:pPr algn="l">
-              <a:spcAft>
-                <a:spcPts val="600"/>
-              </a:spcAft>
-            </a:pPr>
-            <a:r>
-              <a:rPr sz="1500" b="1">
-                <a:solidFill>
-                  <a:srgbClr val="2A2A2A"/>
-                </a:solidFill>
-                <a:latin typeface="Meiryo UI"/>
-              </a:rPr>
-              <a:t>これは「昔の彼女」の話</a:t>
-            </a:r>
-          </a:p>
-        </p:txBody>
-      </p:sp>
-      <p:sp>
-        <p:nvSpPr>
-          <p:cNvPr id="19" name="TextBox 18"/>
-          <p:cNvSpPr txBox="1"/>
-          <p:nvPr/>
-        </p:nvSpPr>
-        <p:spPr>
-          <a:xfrm>
-            <a:off x="5669280" y="2651760"/>
-            <a:ext cx="6126480" cy="329184"/>
-          </a:xfrm>
-          <a:prstGeom prst="rect">
-            <a:avLst/>
-          </a:prstGeom>
-          <a:noFill/>
-        </p:spPr>
-        <p:txBody>
-          <a:bodyPr wrap="square" anchor="t" lIns="45720" rIns="45720">
-            <a:spAutoFit/>
-          </a:bodyPr>
-          <a:lstStyle/>
-          <a:p>
-            <a:pPr algn="l">
-              <a:spcAft>
-                <a:spcPts val="600"/>
-              </a:spcAft>
-            </a:pPr>
-            <a:r>
-              <a:rPr sz="1200" b="0">
-                <a:solidFill>
-                  <a:srgbClr val="666666"/>
-                </a:solidFill>
-                <a:latin typeface="Meiryo UI"/>
-              </a:rPr>
-              <a:t>今の彼女の気持ちとは別。ここからは今世の情や愛情＝川越さんがどうしたいか</a:t>
-            </a:r>
-          </a:p>
-        </p:txBody>
-      </p:sp>
-      <p:sp>
-        <p:nvSpPr>
-          <p:cNvPr id="20" name="Oval 19"/>
-          <p:cNvSpPr/>
-          <p:nvPr/>
-        </p:nvSpPr>
-        <p:spPr>
-          <a:xfrm>
-            <a:off x="5212080" y="2980944"/>
-            <a:ext cx="347472" cy="347472"/>
-          </a:xfrm>
-          <a:prstGeom prst="ellipse">
-            <a:avLst/>
-          </a:prstGeom>
-          <a:solidFill>
-            <a:srgbClr val="C9973A"/>
-          </a:solidFill>
-          <a:ln>
-            <a:noFill/>
-          </a:ln>
-          <a:effectLst/>
-        </p:spPr>
-        <p:style>
-          <a:lnRef idx="1">
-            <a:schemeClr val="accent1"/>
-          </a:lnRef>
-          <a:fillRef idx="3">
-            <a:schemeClr val="accent1"/>
-          </a:fillRef>
-          <a:effectRef idx="2">
-            <a:schemeClr val="accent1"/>
-          </a:effectRef>
-          <a:fontRef idx="minor">
-            <a:schemeClr val="lt1"/>
-          </a:fontRef>
-        </p:style>
-        <p:txBody>
-          <a:bodyPr rtlCol="0" anchor="ctr" wrap="square" lIns="45720" rIns="45720"/>
-          <a:lstStyle/>
-          <a:p>
-            <a:pPr algn="ctr"/>
-            <a:r>
-              <a:rPr sz="1300" b="1">
-                <a:solidFill>
-                  <a:srgbClr val="FFFFFF"/>
-                </a:solidFill>
-                <a:latin typeface="Meiryo UI"/>
-              </a:rPr>
-              <a:t>3</a:t>
-            </a:r>
-          </a:p>
-        </p:txBody>
-      </p:sp>
-      <p:sp>
-        <p:nvSpPr>
-          <p:cNvPr id="21" name="TextBox 20"/>
-          <p:cNvSpPr txBox="1"/>
-          <p:nvPr/>
-        </p:nvSpPr>
-        <p:spPr>
-          <a:xfrm>
-            <a:off x="5669280" y="2916936"/>
-            <a:ext cx="6126480" cy="329184"/>
-          </a:xfrm>
-          <a:prstGeom prst="rect">
-            <a:avLst/>
-          </a:prstGeom>
-          <a:noFill/>
-        </p:spPr>
-        <p:txBody>
-          <a:bodyPr wrap="square" anchor="t" lIns="45720" rIns="45720">
-            <a:spAutoFit/>
-          </a:bodyPr>
-          <a:lstStyle/>
-          <a:p>
-            <a:pPr algn="l">
-              <a:spcAft>
-                <a:spcPts val="600"/>
-              </a:spcAft>
-            </a:pPr>
-            <a:r>
-              <a:rPr sz="1500" b="1">
-                <a:solidFill>
-                  <a:srgbClr val="2A2A2A"/>
-                </a:solidFill>
-                <a:latin typeface="Meiryo UI"/>
-              </a:rPr>
-              <a:t>心の器を育てる：手放すか、来世につなぐか</a:t>
-            </a:r>
-          </a:p>
-        </p:txBody>
-      </p:sp>
-      <p:sp>
-        <p:nvSpPr>
-          <p:cNvPr id="22" name="TextBox 21"/>
-          <p:cNvSpPr txBox="1"/>
-          <p:nvPr/>
-        </p:nvSpPr>
-        <p:spPr>
-          <a:xfrm>
-            <a:off x="5669280" y="3218687"/>
-            <a:ext cx="6126480" cy="329184"/>
-          </a:xfrm>
-          <a:prstGeom prst="rect">
-            <a:avLst/>
-          </a:prstGeom>
-          <a:noFill/>
-        </p:spPr>
-        <p:txBody>
-          <a:bodyPr wrap="square" anchor="t" lIns="45720" rIns="45720">
-            <a:spAutoFit/>
-          </a:bodyPr>
-          <a:lstStyle/>
-          <a:p>
-            <a:pPr algn="l">
-              <a:spcAft>
-                <a:spcPts val="600"/>
-              </a:spcAft>
-            </a:pPr>
-            <a:r>
-              <a:rPr sz="1200" b="0">
-                <a:solidFill>
-                  <a:srgbClr val="666666"/>
-                </a:solidFill>
-                <a:latin typeface="Meiryo UI"/>
-              </a:rPr>
-              <a:t>どちらを選んでも、今関係を深めることが彼女を傷つけないか、考えてみて</a:t>
-            </a:r>
-          </a:p>
-        </p:txBody>
-      </p:sp>
-      <p:sp>
-        <p:nvSpPr>
-          <p:cNvPr id="23" name="Oval 22"/>
-          <p:cNvSpPr/>
-          <p:nvPr/>
-        </p:nvSpPr>
-        <p:spPr>
-          <a:xfrm>
-            <a:off x="5212080" y="3547872"/>
-            <a:ext cx="347472" cy="347472"/>
-          </a:xfrm>
-          <a:prstGeom prst="ellipse">
-            <a:avLst/>
-          </a:prstGeom>
-          <a:solidFill>
-            <a:srgbClr val="C9973A"/>
-          </a:solidFill>
-          <a:ln>
-            <a:noFill/>
-          </a:ln>
-          <a:effectLst/>
-        </p:spPr>
-        <p:style>
-          <a:lnRef idx="1">
-            <a:schemeClr val="accent1"/>
-          </a:lnRef>
-          <a:fillRef idx="3">
-            <a:schemeClr val="accent1"/>
-          </a:fillRef>
-          <a:effectRef idx="2">
-            <a:schemeClr val="accent1"/>
-          </a:effectRef>
-          <a:fontRef idx="minor">
-            <a:schemeClr val="lt1"/>
-          </a:fontRef>
-        </p:style>
-        <p:txBody>
-          <a:bodyPr rtlCol="0" anchor="ctr" wrap="square" lIns="45720" rIns="45720"/>
-          <a:lstStyle/>
-          <a:p>
-            <a:pPr algn="ctr"/>
-            <a:r>
-              <a:rPr sz="1300" b="1">
-                <a:solidFill>
-                  <a:srgbClr val="FFFFFF"/>
-                </a:solidFill>
-                <a:latin typeface="Meiryo UI"/>
-              </a:rPr>
-              <a:t>4</a:t>
-            </a:r>
-          </a:p>
-        </p:txBody>
-      </p:sp>
-      <p:sp>
-        <p:nvSpPr>
-          <p:cNvPr id="24" name="TextBox 23"/>
-          <p:cNvSpPr txBox="1"/>
-          <p:nvPr/>
-        </p:nvSpPr>
-        <p:spPr>
-          <a:xfrm>
-            <a:off x="5669280" y="3483864"/>
-            <a:ext cx="6126480" cy="329184"/>
-          </a:xfrm>
-          <a:prstGeom prst="rect">
-            <a:avLst/>
-          </a:prstGeom>
-          <a:noFill/>
-        </p:spPr>
-        <p:txBody>
-          <a:bodyPr wrap="square" anchor="t" lIns="45720" rIns="45720">
-            <a:spAutoFit/>
-          </a:bodyPr>
-          <a:lstStyle/>
-          <a:p>
-            <a:pPr algn="l">
-              <a:spcAft>
-                <a:spcPts val="600"/>
-              </a:spcAft>
-            </a:pPr>
-            <a:r>
-              <a:rPr sz="1500" b="1">
-                <a:solidFill>
-                  <a:srgbClr val="2A2A2A"/>
-                </a:solidFill>
-                <a:latin typeface="Meiryo UI"/>
-              </a:rPr>
-              <a:t>現実のことも大切に</a:t>
-            </a:r>
-          </a:p>
-        </p:txBody>
-      </p:sp>
-      <p:sp>
-        <p:nvSpPr>
-          <p:cNvPr id="25" name="TextBox 24"/>
-          <p:cNvSpPr txBox="1"/>
-          <p:nvPr/>
-        </p:nvSpPr>
-        <p:spPr>
-          <a:xfrm>
-            <a:off x="5669280" y="3785615"/>
-            <a:ext cx="6126480" cy="329184"/>
-          </a:xfrm>
-          <a:prstGeom prst="rect">
-            <a:avLst/>
-          </a:prstGeom>
-          <a:noFill/>
-        </p:spPr>
-        <p:txBody>
-          <a:bodyPr wrap="square" anchor="t" lIns="45720" rIns="45720">
-            <a:spAutoFit/>
-          </a:bodyPr>
-          <a:lstStyle/>
-          <a:p>
-            <a:pPr algn="l">
-              <a:spcAft>
-                <a:spcPts val="600"/>
-              </a:spcAft>
-            </a:pPr>
-            <a:r>
-              <a:rPr sz="1200" b="0">
-                <a:solidFill>
-                  <a:srgbClr val="666666"/>
-                </a:solidFill>
-                <a:latin typeface="Meiryo UI"/>
-              </a:rPr>
-              <a:t>これ以上近づくと、彼女が今のご主人への罪悪感を抱えることに。法律の面も考えて</a:t>
-            </a:r>
-          </a:p>
-        </p:txBody>
-      </p:sp>
-      <p:sp>
-        <p:nvSpPr>
-          <p:cNvPr id="26" name="Oval 25"/>
-          <p:cNvSpPr/>
-          <p:nvPr/>
-        </p:nvSpPr>
-        <p:spPr>
-          <a:xfrm>
-            <a:off x="5212080" y="4114800"/>
-            <a:ext cx="347472" cy="347472"/>
-          </a:xfrm>
-          <a:prstGeom prst="ellipse">
-            <a:avLst/>
-          </a:prstGeom>
-          <a:solidFill>
-            <a:srgbClr val="D9443B"/>
-          </a:solidFill>
-          <a:ln>
-            <a:noFill/>
-          </a:ln>
-          <a:effectLst/>
-        </p:spPr>
-        <p:style>
-          <a:lnRef idx="1">
-            <a:schemeClr val="accent1"/>
-          </a:lnRef>
-          <a:fillRef idx="3">
-            <a:schemeClr val="accent1"/>
-          </a:fillRef>
-          <a:effectRef idx="2">
-            <a:schemeClr val="accent1"/>
-          </a:effectRef>
-          <a:fontRef idx="minor">
-            <a:schemeClr val="lt1"/>
-          </a:fontRef>
-        </p:style>
-        <p:txBody>
-          <a:bodyPr rtlCol="0" anchor="ctr" wrap="square" lIns="45720" rIns="45720"/>
-          <a:lstStyle/>
-          <a:p>
-            <a:pPr algn="ctr"/>
-            <a:r>
-              <a:rPr sz="1300" b="1">
-                <a:solidFill>
-                  <a:srgbClr val="FFFFFF"/>
-                </a:solidFill>
-                <a:latin typeface="Meiryo UI"/>
-              </a:rPr>
-              <a:t>5</a:t>
-            </a:r>
-          </a:p>
-        </p:txBody>
-      </p:sp>
-      <p:sp>
-        <p:nvSpPr>
-          <p:cNvPr id="27" name="TextBox 26"/>
-          <p:cNvSpPr txBox="1"/>
-          <p:nvPr/>
-        </p:nvSpPr>
-        <p:spPr>
-          <a:xfrm>
-            <a:off x="5669280" y="4050791"/>
-            <a:ext cx="6126480" cy="329184"/>
-          </a:xfrm>
-          <a:prstGeom prst="rect">
-            <a:avLst/>
-          </a:prstGeom>
-          <a:noFill/>
-        </p:spPr>
-        <p:txBody>
-          <a:bodyPr wrap="square" anchor="t" lIns="45720" rIns="45720">
-            <a:spAutoFit/>
-          </a:bodyPr>
-          <a:lstStyle/>
-          <a:p>
-            <a:pPr algn="l">
-              <a:spcAft>
-                <a:spcPts val="600"/>
-              </a:spcAft>
-            </a:pPr>
-            <a:r>
-              <a:rPr sz="1500" b="1">
-                <a:solidFill>
-                  <a:srgbClr val="D9443B"/>
-                </a:solidFill>
-                <a:latin typeface="Meiryo UI"/>
-              </a:rPr>
-              <a:t>今以上を願うと、彼女の家庭を壊しかねません</a:t>
-            </a:r>
-          </a:p>
-        </p:txBody>
-      </p:sp>
-      <p:sp>
-        <p:nvSpPr>
-          <p:cNvPr id="28" name="TextBox 27"/>
-          <p:cNvSpPr txBox="1"/>
-          <p:nvPr/>
-        </p:nvSpPr>
-        <p:spPr>
-          <a:xfrm>
-            <a:off x="5669280" y="4352544"/>
-            <a:ext cx="6126480" cy="329184"/>
-          </a:xfrm>
-          <a:prstGeom prst="rect">
-            <a:avLst/>
-          </a:prstGeom>
-          <a:noFill/>
-        </p:spPr>
-        <p:txBody>
-          <a:bodyPr wrap="square" anchor="t" lIns="45720" rIns="45720">
-            <a:spAutoFit/>
-          </a:bodyPr>
-          <a:lstStyle/>
-          <a:p>
-            <a:pPr algn="l">
-              <a:spcAft>
-                <a:spcPts val="600"/>
-              </a:spcAft>
-            </a:pPr>
-            <a:r>
-              <a:rPr sz="1200" b="0">
-                <a:solidFill>
-                  <a:srgbClr val="666666"/>
-                </a:solidFill>
-                <a:latin typeface="Meiryo UI"/>
-              </a:rPr>
-              <a:t>家庭が揺らげば新しい恨みが生まれ、それが川越さんの体に返ってくる可能性があります</a:t>
-            </a:r>
-          </a:p>
-        </p:txBody>
-      </p:sp>
-      <p:sp>
-        <p:nvSpPr>
-          <p:cNvPr id="29" name="Oval 28"/>
-          <p:cNvSpPr/>
-          <p:nvPr/>
-        </p:nvSpPr>
-        <p:spPr>
-          <a:xfrm>
-            <a:off x="5212080" y="4681728"/>
-            <a:ext cx="347472" cy="347472"/>
-          </a:xfrm>
-          <a:prstGeom prst="ellipse">
-            <a:avLst/>
-          </a:prstGeom>
-          <a:solidFill>
-            <a:srgbClr val="D9443B"/>
-          </a:solidFill>
-          <a:ln>
-            <a:noFill/>
-          </a:ln>
-          <a:effectLst/>
-        </p:spPr>
-        <p:style>
-          <a:lnRef idx="1">
-            <a:schemeClr val="accent1"/>
-          </a:lnRef>
-          <a:fillRef idx="3">
-            <a:schemeClr val="accent1"/>
-          </a:fillRef>
-          <a:effectRef idx="2">
-            <a:schemeClr val="accent1"/>
-          </a:effectRef>
-          <a:fontRef idx="minor">
-            <a:schemeClr val="lt1"/>
-          </a:fontRef>
-        </p:style>
-        <p:txBody>
-          <a:bodyPr rtlCol="0" anchor="ctr" wrap="square" lIns="45720" rIns="45720"/>
-          <a:lstStyle/>
-          <a:p>
-            <a:pPr algn="ctr"/>
-            <a:r>
-              <a:rPr sz="1300" b="1">
-                <a:solidFill>
-                  <a:srgbClr val="FFFFFF"/>
-                </a:solidFill>
-                <a:latin typeface="Meiryo UI"/>
-              </a:rPr>
-              <a:t>6</a:t>
-            </a:r>
-          </a:p>
-        </p:txBody>
-      </p:sp>
-      <p:sp>
-        <p:nvSpPr>
-          <p:cNvPr id="30" name="TextBox 29"/>
-          <p:cNvSpPr txBox="1"/>
-          <p:nvPr/>
-        </p:nvSpPr>
-        <p:spPr>
-          <a:xfrm>
-            <a:off x="5669280" y="4617720"/>
-            <a:ext cx="6126480" cy="329184"/>
-          </a:xfrm>
-          <a:prstGeom prst="rect">
-            <a:avLst/>
-          </a:prstGeom>
-          <a:noFill/>
-        </p:spPr>
-        <p:txBody>
-          <a:bodyPr wrap="square" anchor="t" lIns="45720" rIns="45720">
-            <a:spAutoFit/>
-          </a:bodyPr>
-          <a:lstStyle/>
-          <a:p>
-            <a:pPr algn="l">
-              <a:spcAft>
-                <a:spcPts val="600"/>
-              </a:spcAft>
-            </a:pPr>
-            <a:r>
-              <a:rPr sz="1500" b="1">
-                <a:solidFill>
-                  <a:srgbClr val="D9443B"/>
-                </a:solidFill>
-                <a:latin typeface="Meiryo UI"/>
-              </a:rPr>
-              <a:t>来世に、新しいカルマのタネをつくることに</a:t>
-            </a:r>
-          </a:p>
-        </p:txBody>
-      </p:sp>
-      <p:sp>
-        <p:nvSpPr>
-          <p:cNvPr id="31" name="TextBox 30"/>
-          <p:cNvSpPr txBox="1"/>
-          <p:nvPr/>
-        </p:nvSpPr>
-        <p:spPr>
-          <a:xfrm>
-            <a:off x="5669280" y="4919472"/>
-            <a:ext cx="6126480" cy="329184"/>
-          </a:xfrm>
-          <a:prstGeom prst="rect">
-            <a:avLst/>
-          </a:prstGeom>
-          <a:noFill/>
-        </p:spPr>
-        <p:txBody>
-          <a:bodyPr wrap="square" anchor="t" lIns="45720" rIns="45720">
-            <a:spAutoFit/>
-          </a:bodyPr>
-          <a:lstStyle/>
-          <a:p>
-            <a:pPr algn="l">
-              <a:spcAft>
-                <a:spcPts val="600"/>
-              </a:spcAft>
-            </a:pPr>
-            <a:r>
-              <a:rPr sz="1200" b="0">
-                <a:solidFill>
-                  <a:srgbClr val="666666"/>
-                </a:solidFill>
-                <a:latin typeface="Meiryo UI"/>
-              </a:rPr>
-              <a:t>今世で終わらせられるご縁を、また来世へ持ち越すことになります</a:t>
-            </a:r>
-          </a:p>
-        </p:txBody>
-      </p:sp>
-      <p:sp>
-        <p:nvSpPr>
-          <p:cNvPr id="32" name="Oval 31"/>
-          <p:cNvSpPr/>
-          <p:nvPr/>
-        </p:nvSpPr>
-        <p:spPr>
-          <a:xfrm>
-            <a:off x="5212080" y="5248655"/>
-            <a:ext cx="347472" cy="347472"/>
-          </a:xfrm>
-          <a:prstGeom prst="ellipse">
-            <a:avLst/>
-          </a:prstGeom>
-          <a:solidFill>
-            <a:srgbClr val="C9973A"/>
-          </a:solidFill>
-          <a:ln>
-            <a:noFill/>
-          </a:ln>
-          <a:effectLst/>
-        </p:spPr>
-        <p:style>
-          <a:lnRef idx="1">
-            <a:schemeClr val="accent1"/>
-          </a:lnRef>
-          <a:fillRef idx="3">
-            <a:schemeClr val="accent1"/>
-          </a:fillRef>
-          <a:effectRef idx="2">
-            <a:schemeClr val="accent1"/>
-          </a:effectRef>
-          <a:fontRef idx="minor">
-            <a:schemeClr val="lt1"/>
-          </a:fontRef>
-        </p:style>
-        <p:txBody>
-          <a:bodyPr rtlCol="0" anchor="ctr" wrap="square" lIns="45720" rIns="45720"/>
-          <a:lstStyle/>
-          <a:p>
-            <a:pPr algn="ctr"/>
-            <a:r>
-              <a:rPr sz="1300" b="1">
-                <a:solidFill>
-                  <a:srgbClr val="FFFFFF"/>
-                </a:solidFill>
-                <a:latin typeface="Meiryo UI"/>
-              </a:rPr>
-              <a:t>7</a:t>
-            </a:r>
-          </a:p>
-        </p:txBody>
-      </p:sp>
-      <p:sp>
-        <p:nvSpPr>
-          <p:cNvPr id="33" name="TextBox 32"/>
-          <p:cNvSpPr txBox="1"/>
-          <p:nvPr/>
-        </p:nvSpPr>
-        <p:spPr>
-          <a:xfrm>
-            <a:off x="5669280" y="5184647"/>
-            <a:ext cx="6126480" cy="329184"/>
-          </a:xfrm>
-          <a:prstGeom prst="rect">
-            <a:avLst/>
-          </a:prstGeom>
-          <a:noFill/>
-        </p:spPr>
-        <p:txBody>
-          <a:bodyPr wrap="square" anchor="t" lIns="45720" rIns="45720">
-            <a:spAutoFit/>
-          </a:bodyPr>
-          <a:lstStyle/>
-          <a:p>
-            <a:pPr algn="l">
-              <a:spcAft>
-                <a:spcPts val="600"/>
-              </a:spcAft>
-            </a:pPr>
-            <a:r>
-              <a:rPr sz="1500" b="1">
-                <a:solidFill>
-                  <a:srgbClr val="2A2A2A"/>
-                </a:solidFill>
-                <a:latin typeface="Meiryo UI"/>
-              </a:rPr>
-              <a:t>エネルギーはやさしく送る・守りは続ける</a:t>
-            </a:r>
-          </a:p>
-        </p:txBody>
-      </p:sp>
-      <p:sp>
-        <p:nvSpPr>
-          <p:cNvPr id="34" name="TextBox 33"/>
-          <p:cNvSpPr txBox="1"/>
-          <p:nvPr/>
-        </p:nvSpPr>
-        <p:spPr>
-          <a:xfrm>
-            <a:off x="5669280" y="5486399"/>
-            <a:ext cx="6126480" cy="329184"/>
-          </a:xfrm>
-          <a:prstGeom prst="rect">
-            <a:avLst/>
-          </a:prstGeom>
-          <a:noFill/>
-        </p:spPr>
-        <p:txBody>
-          <a:bodyPr wrap="square" anchor="t" lIns="45720" rIns="45720">
-            <a:spAutoFit/>
-          </a:bodyPr>
-          <a:lstStyle/>
-          <a:p>
-            <a:pPr algn="l">
-              <a:spcAft>
-                <a:spcPts val="600"/>
-              </a:spcAft>
-            </a:pPr>
-            <a:r>
-              <a:rPr sz="1200" b="0">
-                <a:solidFill>
-                  <a:srgbClr val="666666"/>
-                </a:solidFill>
-                <a:latin typeface="Meiryo UI"/>
-              </a:rPr>
-              <a:t>「思い通りに」を乗せると相手には強い圧に。ご主人のやきもちには寝る前のプロテクトを</a:t>
-            </a:r>
-          </a:p>
-        </p:txBody>
-      </p:sp>
-      <p:sp>
-        <p:nvSpPr>
-          <p:cNvPr id="35" name="Rounded Rectangle 34"/>
-          <p:cNvSpPr/>
-          <p:nvPr/>
-        </p:nvSpPr>
-        <p:spPr>
-          <a:xfrm>
-            <a:off x="457200" y="5852160"/>
-            <a:ext cx="11274552" cy="914400"/>
+            <a:off x="5212080" y="1417320"/>
+            <a:ext cx="6519672" cy="685800"/>
           </a:xfrm>
           <a:prstGeom prst="roundRect">
             <a:avLst/>
@@ -4704,37 +3748,544 @@
           <a:p>
             <a:pPr algn="ctr"/>
             <a:r>
-              <a:rPr sz="1400" b="1">
+              <a:rPr sz="1300" b="1">
                 <a:solidFill>
                   <a:srgbClr val="2B2350"/>
                 </a:solidFill>
                 <a:latin typeface="Meiryo UI"/>
               </a:rPr>
-              <a:t>関係を深めることは、できるのかもしれません。</a:t>
+              <a:t>前世の罪滅ぼしは、もう終わっています</a:t>
             </a:r>
           </a:p>
           <a:p>
             <a:pPr algn="ctr"/>
             <a:r>
-              <a:rPr sz="1400" b="1">
+              <a:rPr sz="1300" b="1">
                 <a:solidFill>
                   <a:srgbClr val="2B2350"/>
                 </a:solidFill>
                 <a:latin typeface="Meiryo UI"/>
               </a:rPr>
-              <a:t>でもそれは、今、身の回りを実際に支えてくれている人たちが離れていくことと、同じ意味かもしれません。</a:t>
-            </a:r>
-          </a:p>
-          <a:p>
-            <a:pPr algn="ctr"/>
-            <a:r>
-              <a:rPr sz="1400" b="1">
+              <a:t>一緒に出かけ、食事を楽しめたことで解消。彼女の結婚が「満足できた」しるし</a:t>
+            </a:r>
+          </a:p>
+        </p:txBody>
+      </p:sp>
+      <p:sp>
+        <p:nvSpPr>
+          <p:cNvPr id="14" name="TextBox 13"/>
+          <p:cNvSpPr txBox="1"/>
+          <p:nvPr/>
+        </p:nvSpPr>
+        <p:spPr>
+          <a:xfrm>
+            <a:off x="5212080" y="2194560"/>
+            <a:ext cx="6492240" cy="411480"/>
+          </a:xfrm>
+          <a:prstGeom prst="rect">
+            <a:avLst/>
+          </a:prstGeom>
+          <a:noFill/>
+        </p:spPr>
+        <p:txBody>
+          <a:bodyPr wrap="square" anchor="t" lIns="45720" rIns="45720">
+            <a:spAutoFit/>
+          </a:bodyPr>
+          <a:lstStyle/>
+          <a:p>
+            <a:pPr algn="l">
+              <a:spcAft>
+                <a:spcPts val="600"/>
+              </a:spcAft>
+            </a:pPr>
+            <a:r>
+              <a:rPr sz="1800" b="1">
                 <a:solidFill>
                   <a:srgbClr val="2B2350"/>
                 </a:solidFill>
                 <a:latin typeface="Meiryo UI"/>
               </a:rPr>
-              <a:t>それを知った上で、どうするかを決めるのは川越さんです。</a:t>
+              <a:t>ここからの道は2つ</a:t>
+            </a:r>
+          </a:p>
+        </p:txBody>
+      </p:sp>
+      <p:sp>
+        <p:nvSpPr>
+          <p:cNvPr id="15" name="Rounded Rectangle 14"/>
+          <p:cNvSpPr/>
+          <p:nvPr/>
+        </p:nvSpPr>
+        <p:spPr>
+          <a:xfrm>
+            <a:off x="5212080" y="2651760"/>
+            <a:ext cx="3154680" cy="3108960"/>
+          </a:xfrm>
+          <a:prstGeom prst="roundRect">
+            <a:avLst/>
+          </a:prstGeom>
+          <a:solidFill>
+            <a:srgbClr val="FBE9E7"/>
+          </a:solidFill>
+          <a:ln>
+            <a:noFill/>
+          </a:ln>
+          <a:effectLst/>
+        </p:spPr>
+        <p:style>
+          <a:lnRef idx="1">
+            <a:schemeClr val="accent1"/>
+          </a:lnRef>
+          <a:fillRef idx="3">
+            <a:schemeClr val="accent1"/>
+          </a:fillRef>
+          <a:effectRef idx="2">
+            <a:schemeClr val="accent1"/>
+          </a:effectRef>
+          <a:fontRef idx="minor">
+            <a:schemeClr val="lt1"/>
+          </a:fontRef>
+        </p:style>
+        <p:txBody>
+          <a:bodyPr rtlCol="0" anchor="ctr"/>
+          <a:lstStyle/>
+          <a:p>
+            <a:pPr algn="ctr"/>
+          </a:p>
+        </p:txBody>
+      </p:sp>
+      <p:sp>
+        <p:nvSpPr>
+          <p:cNvPr id="16" name="Rounded Rectangle 15"/>
+          <p:cNvSpPr/>
+          <p:nvPr/>
+        </p:nvSpPr>
+        <p:spPr>
+          <a:xfrm>
+            <a:off x="5394960" y="2788920"/>
+            <a:ext cx="2788920" cy="594360"/>
+          </a:xfrm>
+          <a:prstGeom prst="roundRect">
+            <a:avLst/>
+          </a:prstGeom>
+          <a:solidFill>
+            <a:srgbClr val="D9443B"/>
+          </a:solidFill>
+          <a:ln>
+            <a:noFill/>
+          </a:ln>
+          <a:effectLst/>
+        </p:spPr>
+        <p:style>
+          <a:lnRef idx="1">
+            <a:schemeClr val="accent1"/>
+          </a:lnRef>
+          <a:fillRef idx="3">
+            <a:schemeClr val="accent1"/>
+          </a:fillRef>
+          <a:effectRef idx="2">
+            <a:schemeClr val="accent1"/>
+          </a:effectRef>
+          <a:fontRef idx="minor">
+            <a:schemeClr val="lt1"/>
+          </a:fontRef>
+        </p:style>
+        <p:txBody>
+          <a:bodyPr rtlCol="0" anchor="ctr" wrap="square" lIns="45720" rIns="45720"/>
+          <a:lstStyle/>
+          <a:p>
+            <a:pPr algn="ctr"/>
+            <a:r>
+              <a:rPr sz="1600" b="1">
+                <a:solidFill>
+                  <a:srgbClr val="FFFFFF"/>
+                </a:solidFill>
+                <a:latin typeface="Meiryo UI"/>
+              </a:rPr>
+              <a:t>今、関係を深める</a:t>
+            </a:r>
+          </a:p>
+        </p:txBody>
+      </p:sp>
+      <p:sp>
+        <p:nvSpPr>
+          <p:cNvPr id="17" name="TextBox 16"/>
+          <p:cNvSpPr txBox="1"/>
+          <p:nvPr/>
+        </p:nvSpPr>
+        <p:spPr>
+          <a:xfrm>
+            <a:off x="5394960" y="3474720"/>
+            <a:ext cx="2788920" cy="960120"/>
+          </a:xfrm>
+          <a:prstGeom prst="rect">
+            <a:avLst/>
+          </a:prstGeom>
+          <a:noFill/>
+        </p:spPr>
+        <p:txBody>
+          <a:bodyPr wrap="square" anchor="ctr" lIns="45720" rIns="45720">
+            <a:spAutoFit/>
+          </a:bodyPr>
+          <a:lstStyle/>
+          <a:p>
+            <a:pPr algn="ctr">
+              <a:spcAft>
+                <a:spcPts val="600"/>
+              </a:spcAft>
+            </a:pPr>
+            <a:r>
+              <a:rPr sz="1400" b="0">
+                <a:solidFill>
+                  <a:srgbClr val="2A2A2A"/>
+                </a:solidFill>
+                <a:latin typeface="Meiryo UI"/>
+              </a:rPr>
+              <a:t>彼女の周りの人も、
+川越さんの周りの人も
+傷つけることになりかねない</a:t>
+            </a:r>
+          </a:p>
+        </p:txBody>
+      </p:sp>
+      <p:cxnSp>
+        <p:nvCxnSpPr>
+          <p:cNvPr id="18" name="Connector 17"/>
+          <p:cNvCxnSpPr/>
+          <p:nvPr/>
+        </p:nvCxnSpPr>
+        <p:spPr>
+          <a:xfrm>
+            <a:off x="6784848" y="4498848"/>
+            <a:ext cx="0" cy="274320"/>
+          </a:xfrm>
+          <a:prstGeom prst="line">
+            <a:avLst/>
+          </a:prstGeom>
+          <a:ln w="38100">
+            <a:solidFill>
+              <a:srgbClr val="D9443B"/>
+            </a:solidFill>
+            <a:tailEnd type="triangle"/>
+          </a:ln>
+        </p:spPr>
+        <p:style>
+          <a:lnRef idx="2">
+            <a:schemeClr val="accent1"/>
+          </a:lnRef>
+          <a:fillRef idx="0">
+            <a:schemeClr val="accent1"/>
+          </a:fillRef>
+          <a:effectRef idx="1">
+            <a:schemeClr val="accent1"/>
+          </a:effectRef>
+          <a:fontRef idx="minor">
+            <a:schemeClr val="tx1"/>
+          </a:fontRef>
+        </p:style>
+      </p:cxnSp>
+      <p:sp>
+        <p:nvSpPr>
+          <p:cNvPr id="19" name="TextBox 18"/>
+          <p:cNvSpPr txBox="1"/>
+          <p:nvPr/>
+        </p:nvSpPr>
+        <p:spPr>
+          <a:xfrm>
+            <a:off x="5394960" y="4846320"/>
+            <a:ext cx="2788920" cy="731520"/>
+          </a:xfrm>
+          <a:prstGeom prst="rect">
+            <a:avLst/>
+          </a:prstGeom>
+          <a:noFill/>
+        </p:spPr>
+        <p:txBody>
+          <a:bodyPr wrap="square" anchor="ctr" lIns="45720" rIns="45720">
+            <a:spAutoFit/>
+          </a:bodyPr>
+          <a:lstStyle/>
+          <a:p>
+            <a:pPr algn="ctr">
+              <a:spcAft>
+                <a:spcPts val="600"/>
+              </a:spcAft>
+            </a:pPr>
+            <a:r>
+              <a:rPr sz="1400" b="1">
+                <a:solidFill>
+                  <a:srgbClr val="D9443B"/>
+                </a:solidFill>
+                <a:latin typeface="Meiryo UI"/>
+              </a:rPr>
+              <a:t>新しい因縁（闇）を生み、
+来世へ持ち越す</a:t>
+            </a:r>
+          </a:p>
+        </p:txBody>
+      </p:sp>
+      <p:sp>
+        <p:nvSpPr>
+          <p:cNvPr id="20" name="Rounded Rectangle 19"/>
+          <p:cNvSpPr/>
+          <p:nvPr/>
+        </p:nvSpPr>
+        <p:spPr>
+          <a:xfrm>
+            <a:off x="8577072" y="2651760"/>
+            <a:ext cx="3154680" cy="3108960"/>
+          </a:xfrm>
+          <a:prstGeom prst="roundRect">
+            <a:avLst/>
+          </a:prstGeom>
+          <a:solidFill>
+            <a:srgbClr val="FBF4E6"/>
+          </a:solidFill>
+          <a:ln>
+            <a:noFill/>
+          </a:ln>
+          <a:effectLst/>
+        </p:spPr>
+        <p:style>
+          <a:lnRef idx="1">
+            <a:schemeClr val="accent1"/>
+          </a:lnRef>
+          <a:fillRef idx="3">
+            <a:schemeClr val="accent1"/>
+          </a:fillRef>
+          <a:effectRef idx="2">
+            <a:schemeClr val="accent1"/>
+          </a:effectRef>
+          <a:fontRef idx="minor">
+            <a:schemeClr val="lt1"/>
+          </a:fontRef>
+        </p:style>
+        <p:txBody>
+          <a:bodyPr rtlCol="0" anchor="ctr"/>
+          <a:lstStyle/>
+          <a:p>
+            <a:pPr algn="ctr"/>
+          </a:p>
+        </p:txBody>
+      </p:sp>
+      <p:sp>
+        <p:nvSpPr>
+          <p:cNvPr id="21" name="Rounded Rectangle 20"/>
+          <p:cNvSpPr/>
+          <p:nvPr/>
+        </p:nvSpPr>
+        <p:spPr>
+          <a:xfrm>
+            <a:off x="8759952" y="2788920"/>
+            <a:ext cx="2788920" cy="594360"/>
+          </a:xfrm>
+          <a:prstGeom prst="roundRect">
+            <a:avLst/>
+          </a:prstGeom>
+          <a:solidFill>
+            <a:srgbClr val="C9973A"/>
+          </a:solidFill>
+          <a:ln>
+            <a:noFill/>
+          </a:ln>
+          <a:effectLst/>
+        </p:spPr>
+        <p:style>
+          <a:lnRef idx="1">
+            <a:schemeClr val="accent1"/>
+          </a:lnRef>
+          <a:fillRef idx="3">
+            <a:schemeClr val="accent1"/>
+          </a:fillRef>
+          <a:effectRef idx="2">
+            <a:schemeClr val="accent1"/>
+          </a:effectRef>
+          <a:fontRef idx="minor">
+            <a:schemeClr val="lt1"/>
+          </a:fontRef>
+        </p:style>
+        <p:txBody>
+          <a:bodyPr rtlCol="0" anchor="ctr" wrap="square" lIns="45720" rIns="45720"/>
+          <a:lstStyle/>
+          <a:p>
+            <a:pPr algn="ctr"/>
+            <a:r>
+              <a:rPr sz="1600" b="1">
+                <a:solidFill>
+                  <a:srgbClr val="FFFFFF"/>
+                </a:solidFill>
+                <a:latin typeface="Meiryo UI"/>
+              </a:rPr>
+              <a:t>今の関係を大切にする</a:t>
+            </a:r>
+          </a:p>
+        </p:txBody>
+      </p:sp>
+      <p:sp>
+        <p:nvSpPr>
+          <p:cNvPr id="22" name="TextBox 21"/>
+          <p:cNvSpPr txBox="1"/>
+          <p:nvPr/>
+        </p:nvSpPr>
+        <p:spPr>
+          <a:xfrm>
+            <a:off x="8759952" y="3474720"/>
+            <a:ext cx="2788920" cy="960120"/>
+          </a:xfrm>
+          <a:prstGeom prst="rect">
+            <a:avLst/>
+          </a:prstGeom>
+          <a:noFill/>
+        </p:spPr>
+        <p:txBody>
+          <a:bodyPr wrap="square" anchor="ctr" lIns="45720" rIns="45720">
+            <a:spAutoFit/>
+          </a:bodyPr>
+          <a:lstStyle/>
+          <a:p>
+            <a:pPr algn="ctr">
+              <a:spcAft>
+                <a:spcPts val="600"/>
+              </a:spcAft>
+            </a:pPr>
+            <a:r>
+              <a:rPr sz="1400" b="0">
+                <a:solidFill>
+                  <a:srgbClr val="2A2A2A"/>
+                </a:solidFill>
+                <a:latin typeface="Meiryo UI"/>
+              </a:rPr>
+              <a:t>彼女の今の暮らしと
+幸せを見守る</a:t>
+            </a:r>
+          </a:p>
+        </p:txBody>
+      </p:sp>
+      <p:cxnSp>
+        <p:nvCxnSpPr>
+          <p:cNvPr id="23" name="Connector 22"/>
+          <p:cNvCxnSpPr/>
+          <p:nvPr/>
+        </p:nvCxnSpPr>
+        <p:spPr>
+          <a:xfrm>
+            <a:off x="10149840" y="4498848"/>
+            <a:ext cx="0" cy="274320"/>
+          </a:xfrm>
+          <a:prstGeom prst="line">
+            <a:avLst/>
+          </a:prstGeom>
+          <a:ln w="38100">
+            <a:solidFill>
+              <a:srgbClr val="C9973A"/>
+            </a:solidFill>
+            <a:tailEnd type="triangle"/>
+          </a:ln>
+        </p:spPr>
+        <p:style>
+          <a:lnRef idx="2">
+            <a:schemeClr val="accent1"/>
+          </a:lnRef>
+          <a:fillRef idx="0">
+            <a:schemeClr val="accent1"/>
+          </a:fillRef>
+          <a:effectRef idx="1">
+            <a:schemeClr val="accent1"/>
+          </a:effectRef>
+          <a:fontRef idx="minor">
+            <a:schemeClr val="tx1"/>
+          </a:fontRef>
+        </p:style>
+      </p:cxnSp>
+      <p:sp>
+        <p:nvSpPr>
+          <p:cNvPr id="24" name="TextBox 23"/>
+          <p:cNvSpPr txBox="1"/>
+          <p:nvPr/>
+        </p:nvSpPr>
+        <p:spPr>
+          <a:xfrm>
+            <a:off x="8759952" y="4846320"/>
+            <a:ext cx="2788920" cy="731520"/>
+          </a:xfrm>
+          <a:prstGeom prst="rect">
+            <a:avLst/>
+          </a:prstGeom>
+          <a:noFill/>
+        </p:spPr>
+        <p:txBody>
+          <a:bodyPr wrap="square" anchor="ctr" lIns="45720" rIns="45720">
+            <a:spAutoFit/>
+          </a:bodyPr>
+          <a:lstStyle/>
+          <a:p>
+            <a:pPr algn="ctr">
+              <a:spcAft>
+                <a:spcPts val="600"/>
+              </a:spcAft>
+            </a:pPr>
+            <a:r>
+              <a:rPr sz="1400" b="1">
+                <a:solidFill>
+                  <a:srgbClr val="C9973A"/>
+                </a:solidFill>
+                <a:latin typeface="Meiryo UI"/>
+              </a:rPr>
+              <a:t>来世で、良いご縁として
+一緒になる</a:t>
+            </a:r>
+          </a:p>
+        </p:txBody>
+      </p:sp>
+      <p:sp>
+        <p:nvSpPr>
+          <p:cNvPr id="25" name="Rounded Rectangle 24"/>
+          <p:cNvSpPr/>
+          <p:nvPr/>
+        </p:nvSpPr>
+        <p:spPr>
+          <a:xfrm>
+            <a:off x="457200" y="5943600"/>
+            <a:ext cx="11274552" cy="731520"/>
+          </a:xfrm>
+          <a:prstGeom prst="roundRect">
+            <a:avLst/>
+          </a:prstGeom>
+          <a:solidFill>
+            <a:srgbClr val="2B2350"/>
+          </a:solidFill>
+          <a:ln>
+            <a:noFill/>
+          </a:ln>
+          <a:effectLst/>
+        </p:spPr>
+        <p:style>
+          <a:lnRef idx="1">
+            <a:schemeClr val="accent1"/>
+          </a:lnRef>
+          <a:fillRef idx="3">
+            <a:schemeClr val="accent1"/>
+          </a:fillRef>
+          <a:effectRef idx="2">
+            <a:schemeClr val="accent1"/>
+          </a:effectRef>
+          <a:fontRef idx="minor">
+            <a:schemeClr val="lt1"/>
+          </a:fontRef>
+        </p:style>
+        <p:txBody>
+          <a:bodyPr rtlCol="0" anchor="ctr" wrap="square" lIns="45720" rIns="45720"/>
+          <a:lstStyle/>
+          <a:p>
+            <a:pPr algn="ctr"/>
+            <a:r>
+              <a:rPr sz="1800" b="1">
+                <a:solidFill>
+                  <a:srgbClr val="FFFFFF"/>
+                </a:solidFill>
+                <a:latin typeface="Meiryo UI"/>
+              </a:rPr>
+              <a:t>来世で良いご縁となるのか、因縁になるのかは、ここからの川越さんの行動しだいです</a:t>
             </a:r>
           </a:p>
         </p:txBody>

--- a/20_Projects/海音_心体の調律/タマラ/川越さん/20261014_ご縁と考え方_お食事の方.pptx
+++ b/20_Projects/海音_心体の調律/タマラ/川越さん/20261014_ご縁と考え方_お食事の方.pptx
@@ -5,9 +5,9 @@
     <p:sldMasterId id="2147483648" r:id="rId1"/>
   </p:sldMasterIdLst>
   <p:sldIdLst>
-    <p:sldId id="256" r:id="rId7"/>
+    <p:sldId id="256" r:id="rId2"/>
   </p:sldIdLst>
-  <p:sldSz cx="12191695" cy="6858000" type="screen4x3"/>
+  <p:sldSz cx="12192000" cy="6858000"/>
   <p:notesSz cx="6858000" cy="9144000"/>
   <p:defaultTextStyle>
     <a:defPPr>
@@ -104,6 +104,22 @@
       </a:defRPr>
     </a:lvl9pPr>
   </p:defaultTextStyle>
+  <p:extLst>
+    <p:ext uri="{EFAFB233-063F-42B5-8137-9DF3F51BA10A}">
+      <p15:sldGuideLst xmlns:p15="http://schemas.microsoft.com/office/powerpoint/2012/main">
+        <p15:guide id="1" orient="horz" pos="2160">
+          <p15:clr>
+            <a:srgbClr val="A4A3A4"/>
+          </p15:clr>
+        </p15:guide>
+        <p15:guide id="2" pos="2880">
+          <p15:clr>
+            <a:srgbClr val="A4A3A4"/>
+          </p15:clr>
+        </p15:guide>
+      </p15:sldGuideLst>
+    </p:ext>
+  </p:extLst>
 </p:presentation>
 </file>
 
@@ -145,10 +161,9 @@
           <a:lstStyle/>
           <a:p>
             <a:r>
-              <a:rPr lang="en-US" smtClean="0"/>
+              <a:rPr lang="en-US"/>
               <a:t>Click to edit Master title style</a:t>
             </a:r>
-            <a:endParaRPr lang="en-US"/>
           </a:p>
         </p:txBody>
       </p:sp>
@@ -264,10 +279,9 @@
           </a:lstStyle>
           <a:p>
             <a:r>
-              <a:rPr lang="en-US" smtClean="0"/>
+              <a:rPr lang="en-US"/>
               <a:t>Click to edit Master subtitle style</a:t>
             </a:r>
-            <a:endParaRPr lang="en-US"/>
           </a:p>
         </p:txBody>
       </p:sp>
@@ -288,7 +302,7 @@
           <a:p>
             <a:fld id="{5BCAD085-E8A6-8845-BD4E-CB4CCA059FC4}" type="datetimeFigureOut">
               <a:rPr lang="en-US" smtClean="0"/>
-              <a:t>1/27/13</a:t>
+              <a:t>10/14/2026</a:t>
             </a:fld>
             <a:endParaRPr lang="en-US"/>
           </a:p>
@@ -382,10 +396,9 @@
           <a:lstStyle/>
           <a:p>
             <a:r>
-              <a:rPr lang="en-US" smtClean="0"/>
+              <a:rPr lang="en-US"/>
               <a:t>Click to edit Master title style</a:t>
             </a:r>
-            <a:endParaRPr lang="en-US"/>
           </a:p>
         </p:txBody>
       </p:sp>
@@ -406,38 +419,37 @@
           <a:p>
             <a:pPr lvl="0"/>
             <a:r>
-              <a:rPr lang="en-US" smtClean="0"/>
+              <a:rPr lang="en-US"/>
               <a:t>Click to edit Master text styles</a:t>
             </a:r>
           </a:p>
           <a:p>
             <a:pPr lvl="1"/>
             <a:r>
-              <a:rPr lang="en-US" smtClean="0"/>
+              <a:rPr lang="en-US"/>
               <a:t>Second level</a:t>
             </a:r>
           </a:p>
           <a:p>
             <a:pPr lvl="2"/>
             <a:r>
-              <a:rPr lang="en-US" smtClean="0"/>
+              <a:rPr lang="en-US"/>
               <a:t>Third level</a:t>
             </a:r>
           </a:p>
           <a:p>
             <a:pPr lvl="3"/>
             <a:r>
-              <a:rPr lang="en-US" smtClean="0"/>
+              <a:rPr lang="en-US"/>
               <a:t>Fourth level</a:t>
             </a:r>
           </a:p>
           <a:p>
             <a:pPr lvl="4"/>
             <a:r>
-              <a:rPr lang="en-US" smtClean="0"/>
+              <a:rPr lang="en-US"/>
               <a:t>Fifth level</a:t>
             </a:r>
-            <a:endParaRPr lang="en-US"/>
           </a:p>
         </p:txBody>
       </p:sp>
@@ -458,7 +470,7 @@
           <a:p>
             <a:fld id="{5BCAD085-E8A6-8845-BD4E-CB4CCA059FC4}" type="datetimeFigureOut">
               <a:rPr lang="en-US" smtClean="0"/>
-              <a:t>1/27/13</a:t>
+              <a:t>10/14/2026</a:t>
             </a:fld>
             <a:endParaRPr lang="en-US"/>
           </a:p>
@@ -557,10 +569,9 @@
           <a:lstStyle/>
           <a:p>
             <a:r>
-              <a:rPr lang="en-US" smtClean="0"/>
+              <a:rPr lang="en-US"/>
               <a:t>Click to edit Master title style</a:t>
             </a:r>
-            <a:endParaRPr lang="en-US"/>
           </a:p>
         </p:txBody>
       </p:sp>
@@ -586,38 +597,37 @@
           <a:p>
             <a:pPr lvl="0"/>
             <a:r>
-              <a:rPr lang="en-US" smtClean="0"/>
+              <a:rPr lang="en-US"/>
               <a:t>Click to edit Master text styles</a:t>
             </a:r>
           </a:p>
           <a:p>
             <a:pPr lvl="1"/>
             <a:r>
-              <a:rPr lang="en-US" smtClean="0"/>
+              <a:rPr lang="en-US"/>
               <a:t>Second level</a:t>
             </a:r>
           </a:p>
           <a:p>
             <a:pPr lvl="2"/>
             <a:r>
-              <a:rPr lang="en-US" smtClean="0"/>
+              <a:rPr lang="en-US"/>
               <a:t>Third level</a:t>
             </a:r>
           </a:p>
           <a:p>
             <a:pPr lvl="3"/>
             <a:r>
-              <a:rPr lang="en-US" smtClean="0"/>
+              <a:rPr lang="en-US"/>
               <a:t>Fourth level</a:t>
             </a:r>
           </a:p>
           <a:p>
             <a:pPr lvl="4"/>
             <a:r>
-              <a:rPr lang="en-US" smtClean="0"/>
+              <a:rPr lang="en-US"/>
               <a:t>Fifth level</a:t>
             </a:r>
-            <a:endParaRPr lang="en-US"/>
           </a:p>
         </p:txBody>
       </p:sp>
@@ -638,7 +648,7 @@
           <a:p>
             <a:fld id="{5BCAD085-E8A6-8845-BD4E-CB4CCA059FC4}" type="datetimeFigureOut">
               <a:rPr lang="en-US" smtClean="0"/>
-              <a:t>1/27/13</a:t>
+              <a:t>10/14/2026</a:t>
             </a:fld>
             <a:endParaRPr lang="en-US"/>
           </a:p>
@@ -732,10 +742,9 @@
           <a:lstStyle/>
           <a:p>
             <a:r>
-              <a:rPr lang="en-US" smtClean="0"/>
+              <a:rPr lang="en-US"/>
               <a:t>Click to edit Master title style</a:t>
             </a:r>
-            <a:endParaRPr lang="en-US"/>
           </a:p>
         </p:txBody>
       </p:sp>
@@ -756,38 +765,37 @@
           <a:p>
             <a:pPr lvl="0"/>
             <a:r>
-              <a:rPr lang="en-US" smtClean="0"/>
+              <a:rPr lang="en-US"/>
               <a:t>Click to edit Master text styles</a:t>
             </a:r>
           </a:p>
           <a:p>
             <a:pPr lvl="1"/>
             <a:r>
-              <a:rPr lang="en-US" smtClean="0"/>
+              <a:rPr lang="en-US"/>
               <a:t>Second level</a:t>
             </a:r>
           </a:p>
           <a:p>
             <a:pPr lvl="2"/>
             <a:r>
-              <a:rPr lang="en-US" smtClean="0"/>
+              <a:rPr lang="en-US"/>
               <a:t>Third level</a:t>
             </a:r>
           </a:p>
           <a:p>
             <a:pPr lvl="3"/>
             <a:r>
-              <a:rPr lang="en-US" smtClean="0"/>
+              <a:rPr lang="en-US"/>
               <a:t>Fourth level</a:t>
             </a:r>
           </a:p>
           <a:p>
             <a:pPr lvl="4"/>
             <a:r>
-              <a:rPr lang="en-US" smtClean="0"/>
+              <a:rPr lang="en-US"/>
               <a:t>Fifth level</a:t>
             </a:r>
-            <a:endParaRPr lang="en-US"/>
           </a:p>
         </p:txBody>
       </p:sp>
@@ -808,7 +816,7 @@
           <a:p>
             <a:fld id="{5BCAD085-E8A6-8845-BD4E-CB4CCA059FC4}" type="datetimeFigureOut">
               <a:rPr lang="en-US" smtClean="0"/>
-              <a:t>1/27/13</a:t>
+              <a:t>10/14/2026</a:t>
             </a:fld>
             <a:endParaRPr lang="en-US"/>
           </a:p>
@@ -911,10 +919,9 @@
           </a:lstStyle>
           <a:p>
             <a:r>
-              <a:rPr lang="en-US" smtClean="0"/>
+              <a:rPr lang="en-US"/>
               <a:t>Click to edit Master title style</a:t>
             </a:r>
-            <a:endParaRPr lang="en-US"/>
           </a:p>
         </p:txBody>
       </p:sp>
@@ -1031,7 +1038,7 @@
           <a:p>
             <a:pPr lvl="0"/>
             <a:r>
-              <a:rPr lang="en-US" smtClean="0"/>
+              <a:rPr lang="en-US"/>
               <a:t>Click to edit Master text styles</a:t>
             </a:r>
           </a:p>
@@ -1054,7 +1061,7 @@
           <a:p>
             <a:fld id="{5BCAD085-E8A6-8845-BD4E-CB4CCA059FC4}" type="datetimeFigureOut">
               <a:rPr lang="en-US" smtClean="0"/>
-              <a:t>1/27/13</a:t>
+              <a:t>10/14/2026</a:t>
             </a:fld>
             <a:endParaRPr lang="en-US"/>
           </a:p>
@@ -1148,10 +1155,9 @@
           <a:lstStyle/>
           <a:p>
             <a:r>
-              <a:rPr lang="en-US" smtClean="0"/>
+              <a:rPr lang="en-US"/>
               <a:t>Click to edit Master title style</a:t>
             </a:r>
-            <a:endParaRPr lang="en-US"/>
           </a:p>
         </p:txBody>
       </p:sp>
@@ -1205,38 +1211,37 @@
           <a:p>
             <a:pPr lvl="0"/>
             <a:r>
-              <a:rPr lang="en-US" smtClean="0"/>
+              <a:rPr lang="en-US"/>
               <a:t>Click to edit Master text styles</a:t>
             </a:r>
           </a:p>
           <a:p>
             <a:pPr lvl="1"/>
             <a:r>
-              <a:rPr lang="en-US" smtClean="0"/>
+              <a:rPr lang="en-US"/>
               <a:t>Second level</a:t>
             </a:r>
           </a:p>
           <a:p>
             <a:pPr lvl="2"/>
             <a:r>
-              <a:rPr lang="en-US" smtClean="0"/>
+              <a:rPr lang="en-US"/>
               <a:t>Third level</a:t>
             </a:r>
           </a:p>
           <a:p>
             <a:pPr lvl="3"/>
             <a:r>
-              <a:rPr lang="en-US" smtClean="0"/>
+              <a:rPr lang="en-US"/>
               <a:t>Fourth level</a:t>
             </a:r>
           </a:p>
           <a:p>
             <a:pPr lvl="4"/>
             <a:r>
-              <a:rPr lang="en-US" smtClean="0"/>
+              <a:rPr lang="en-US"/>
               <a:t>Fifth level</a:t>
             </a:r>
-            <a:endParaRPr lang="en-US"/>
           </a:p>
         </p:txBody>
       </p:sp>
@@ -1290,38 +1295,37 @@
           <a:p>
             <a:pPr lvl="0"/>
             <a:r>
-              <a:rPr lang="en-US" smtClean="0"/>
+              <a:rPr lang="en-US"/>
               <a:t>Click to edit Master text styles</a:t>
             </a:r>
           </a:p>
           <a:p>
             <a:pPr lvl="1"/>
             <a:r>
-              <a:rPr lang="en-US" smtClean="0"/>
+              <a:rPr lang="en-US"/>
               <a:t>Second level</a:t>
             </a:r>
           </a:p>
           <a:p>
             <a:pPr lvl="2"/>
             <a:r>
-              <a:rPr lang="en-US" smtClean="0"/>
+              <a:rPr lang="en-US"/>
               <a:t>Third level</a:t>
             </a:r>
           </a:p>
           <a:p>
             <a:pPr lvl="3"/>
             <a:r>
-              <a:rPr lang="en-US" smtClean="0"/>
+              <a:rPr lang="en-US"/>
               <a:t>Fourth level</a:t>
             </a:r>
           </a:p>
           <a:p>
             <a:pPr lvl="4"/>
             <a:r>
-              <a:rPr lang="en-US" smtClean="0"/>
+              <a:rPr lang="en-US"/>
               <a:t>Fifth level</a:t>
             </a:r>
-            <a:endParaRPr lang="en-US"/>
           </a:p>
         </p:txBody>
       </p:sp>
@@ -1342,7 +1346,7 @@
           <a:p>
             <a:fld id="{5BCAD085-E8A6-8845-BD4E-CB4CCA059FC4}" type="datetimeFigureOut">
               <a:rPr lang="en-US" smtClean="0"/>
-              <a:t>1/27/13</a:t>
+              <a:t>10/14/2026</a:t>
             </a:fld>
             <a:endParaRPr lang="en-US"/>
           </a:p>
@@ -1440,10 +1444,9 @@
           </a:lstStyle>
           <a:p>
             <a:r>
-              <a:rPr lang="en-US" smtClean="0"/>
+              <a:rPr lang="en-US"/>
               <a:t>Click to edit Master title style</a:t>
             </a:r>
-            <a:endParaRPr lang="en-US"/>
           </a:p>
         </p:txBody>
       </p:sp>
@@ -1506,7 +1509,7 @@
           <a:p>
             <a:pPr lvl="0"/>
             <a:r>
-              <a:rPr lang="en-US" smtClean="0"/>
+              <a:rPr lang="en-US"/>
               <a:t>Click to edit Master text styles</a:t>
             </a:r>
           </a:p>
@@ -1562,38 +1565,37 @@
           <a:p>
             <a:pPr lvl="0"/>
             <a:r>
-              <a:rPr lang="en-US" smtClean="0"/>
+              <a:rPr lang="en-US"/>
               <a:t>Click to edit Master text styles</a:t>
             </a:r>
           </a:p>
           <a:p>
             <a:pPr lvl="1"/>
             <a:r>
-              <a:rPr lang="en-US" smtClean="0"/>
+              <a:rPr lang="en-US"/>
               <a:t>Second level</a:t>
             </a:r>
           </a:p>
           <a:p>
             <a:pPr lvl="2"/>
             <a:r>
-              <a:rPr lang="en-US" smtClean="0"/>
+              <a:rPr lang="en-US"/>
               <a:t>Third level</a:t>
             </a:r>
           </a:p>
           <a:p>
             <a:pPr lvl="3"/>
             <a:r>
-              <a:rPr lang="en-US" smtClean="0"/>
+              <a:rPr lang="en-US"/>
               <a:t>Fourth level</a:t>
             </a:r>
           </a:p>
           <a:p>
             <a:pPr lvl="4"/>
             <a:r>
-              <a:rPr lang="en-US" smtClean="0"/>
+              <a:rPr lang="en-US"/>
               <a:t>Fifth level</a:t>
             </a:r>
-            <a:endParaRPr lang="en-US"/>
           </a:p>
         </p:txBody>
       </p:sp>
@@ -1656,7 +1658,7 @@
           <a:p>
             <a:pPr lvl="0"/>
             <a:r>
-              <a:rPr lang="en-US" smtClean="0"/>
+              <a:rPr lang="en-US"/>
               <a:t>Click to edit Master text styles</a:t>
             </a:r>
           </a:p>
@@ -1712,38 +1714,37 @@
           <a:p>
             <a:pPr lvl="0"/>
             <a:r>
-              <a:rPr lang="en-US" smtClean="0"/>
+              <a:rPr lang="en-US"/>
               <a:t>Click to edit Master text styles</a:t>
             </a:r>
           </a:p>
           <a:p>
             <a:pPr lvl="1"/>
             <a:r>
-              <a:rPr lang="en-US" smtClean="0"/>
+              <a:rPr lang="en-US"/>
               <a:t>Second level</a:t>
             </a:r>
           </a:p>
           <a:p>
             <a:pPr lvl="2"/>
             <a:r>
-              <a:rPr lang="en-US" smtClean="0"/>
+              <a:rPr lang="en-US"/>
               <a:t>Third level</a:t>
             </a:r>
           </a:p>
           <a:p>
             <a:pPr lvl="3"/>
             <a:r>
-              <a:rPr lang="en-US" smtClean="0"/>
+              <a:rPr lang="en-US"/>
               <a:t>Fourth level</a:t>
             </a:r>
           </a:p>
           <a:p>
             <a:pPr lvl="4"/>
             <a:r>
-              <a:rPr lang="en-US" smtClean="0"/>
+              <a:rPr lang="en-US"/>
               <a:t>Fifth level</a:t>
             </a:r>
-            <a:endParaRPr lang="en-US"/>
           </a:p>
         </p:txBody>
       </p:sp>
@@ -1764,7 +1765,7 @@
           <a:p>
             <a:fld id="{5BCAD085-E8A6-8845-BD4E-CB4CCA059FC4}" type="datetimeFigureOut">
               <a:rPr lang="en-US" smtClean="0"/>
-              <a:t>1/27/13</a:t>
+              <a:t>10/14/2026</a:t>
             </a:fld>
             <a:endParaRPr lang="en-US"/>
           </a:p>
@@ -1858,10 +1859,9 @@
           <a:lstStyle/>
           <a:p>
             <a:r>
-              <a:rPr lang="en-US" smtClean="0"/>
+              <a:rPr lang="en-US"/>
               <a:t>Click to edit Master title style</a:t>
             </a:r>
-            <a:endParaRPr lang="en-US"/>
           </a:p>
         </p:txBody>
       </p:sp>
@@ -1882,7 +1882,7 @@
           <a:p>
             <a:fld id="{5BCAD085-E8A6-8845-BD4E-CB4CCA059FC4}" type="datetimeFigureOut">
               <a:rPr lang="en-US" smtClean="0"/>
-              <a:t>1/27/13</a:t>
+              <a:t>10/14/2026</a:t>
             </a:fld>
             <a:endParaRPr lang="en-US"/>
           </a:p>
@@ -1977,7 +1977,7 @@
           <a:p>
             <a:fld id="{5BCAD085-E8A6-8845-BD4E-CB4CCA059FC4}" type="datetimeFigureOut">
               <a:rPr lang="en-US" smtClean="0"/>
-              <a:t>1/27/13</a:t>
+              <a:t>10/14/2026</a:t>
             </a:fld>
             <a:endParaRPr lang="en-US"/>
           </a:p>
@@ -2080,10 +2080,9 @@
           </a:lstStyle>
           <a:p>
             <a:r>
-              <a:rPr lang="en-US" smtClean="0"/>
+              <a:rPr lang="en-US"/>
               <a:t>Click to edit Master title style</a:t>
             </a:r>
-            <a:endParaRPr lang="en-US"/>
           </a:p>
         </p:txBody>
       </p:sp>
@@ -2137,38 +2136,37 @@
           <a:p>
             <a:pPr lvl="0"/>
             <a:r>
-              <a:rPr lang="en-US" smtClean="0"/>
+              <a:rPr lang="en-US"/>
               <a:t>Click to edit Master text styles</a:t>
             </a:r>
           </a:p>
           <a:p>
             <a:pPr lvl="1"/>
             <a:r>
-              <a:rPr lang="en-US" smtClean="0"/>
+              <a:rPr lang="en-US"/>
               <a:t>Second level</a:t>
             </a:r>
           </a:p>
           <a:p>
             <a:pPr lvl="2"/>
             <a:r>
-              <a:rPr lang="en-US" smtClean="0"/>
+              <a:rPr lang="en-US"/>
               <a:t>Third level</a:t>
             </a:r>
           </a:p>
           <a:p>
             <a:pPr lvl="3"/>
             <a:r>
-              <a:rPr lang="en-US" smtClean="0"/>
+              <a:rPr lang="en-US"/>
               <a:t>Fourth level</a:t>
             </a:r>
           </a:p>
           <a:p>
             <a:pPr lvl="4"/>
             <a:r>
-              <a:rPr lang="en-US" smtClean="0"/>
+              <a:rPr lang="en-US"/>
               <a:t>Fifth level</a:t>
             </a:r>
-            <a:endParaRPr lang="en-US"/>
           </a:p>
         </p:txBody>
       </p:sp>
@@ -2231,7 +2229,7 @@
           <a:p>
             <a:pPr lvl="0"/>
             <a:r>
-              <a:rPr lang="en-US" smtClean="0"/>
+              <a:rPr lang="en-US"/>
               <a:t>Click to edit Master text styles</a:t>
             </a:r>
           </a:p>
@@ -2254,7 +2252,7 @@
           <a:p>
             <a:fld id="{5BCAD085-E8A6-8845-BD4E-CB4CCA059FC4}" type="datetimeFigureOut">
               <a:rPr lang="en-US" smtClean="0"/>
-              <a:t>1/27/13</a:t>
+              <a:t>10/14/2026</a:t>
             </a:fld>
             <a:endParaRPr lang="en-US"/>
           </a:p>
@@ -2357,10 +2355,9 @@
           </a:lstStyle>
           <a:p>
             <a:r>
-              <a:rPr lang="en-US" smtClean="0"/>
+              <a:rPr lang="en-US"/>
               <a:t>Click to edit Master title style</a:t>
             </a:r>
-            <a:endParaRPr lang="en-US"/>
           </a:p>
         </p:txBody>
       </p:sp>
@@ -2484,7 +2481,7 @@
           <a:p>
             <a:pPr lvl="0"/>
             <a:r>
-              <a:rPr lang="en-US" smtClean="0"/>
+              <a:rPr lang="en-US"/>
               <a:t>Click to edit Master text styles</a:t>
             </a:r>
           </a:p>
@@ -2507,7 +2504,7 @@
           <a:p>
             <a:fld id="{5BCAD085-E8A6-8845-BD4E-CB4CCA059FC4}" type="datetimeFigureOut">
               <a:rPr lang="en-US" smtClean="0"/>
-              <a:t>1/27/13</a:t>
+              <a:t>10/14/2026</a:t>
             </a:fld>
             <a:endParaRPr lang="en-US"/>
           </a:p>
@@ -2616,10 +2613,9 @@
           <a:lstStyle/>
           <a:p>
             <a:r>
-              <a:rPr lang="en-US" smtClean="0"/>
+              <a:rPr lang="en-US"/>
               <a:t>Click to edit Master title style</a:t>
             </a:r>
-            <a:endParaRPr lang="en-US"/>
           </a:p>
         </p:txBody>
       </p:sp>
@@ -2650,38 +2646,37 @@
           <a:p>
             <a:pPr lvl="0"/>
             <a:r>
-              <a:rPr lang="en-US" smtClean="0"/>
+              <a:rPr lang="en-US"/>
               <a:t>Click to edit Master text styles</a:t>
             </a:r>
           </a:p>
           <a:p>
             <a:pPr lvl="1"/>
             <a:r>
-              <a:rPr lang="en-US" smtClean="0"/>
+              <a:rPr lang="en-US"/>
               <a:t>Second level</a:t>
             </a:r>
           </a:p>
           <a:p>
             <a:pPr lvl="2"/>
             <a:r>
-              <a:rPr lang="en-US" smtClean="0"/>
+              <a:rPr lang="en-US"/>
               <a:t>Third level</a:t>
             </a:r>
           </a:p>
           <a:p>
             <a:pPr lvl="3"/>
             <a:r>
-              <a:rPr lang="en-US" smtClean="0"/>
+              <a:rPr lang="en-US"/>
               <a:t>Fourth level</a:t>
             </a:r>
           </a:p>
           <a:p>
             <a:pPr lvl="4"/>
             <a:r>
-              <a:rPr lang="en-US" smtClean="0"/>
+              <a:rPr lang="en-US"/>
               <a:t>Fifth level</a:t>
             </a:r>
-            <a:endParaRPr lang="en-US"/>
           </a:p>
         </p:txBody>
       </p:sp>
@@ -2720,7 +2715,7 @@
           <a:p>
             <a:fld id="{5BCAD085-E8A6-8845-BD4E-CB4CCA059FC4}" type="datetimeFigureOut">
               <a:rPr lang="en-US" smtClean="0"/>
-              <a:t>1/27/13</a:t>
+              <a:t>10/14/2026</a:t>
             </a:fld>
             <a:endParaRPr lang="en-US"/>
           </a:p>
@@ -3079,7 +3074,7 @@
 </file>
 
 <file path=ppt/slides/slide1.xml><?xml version="1.0" encoding="utf-8"?>
-<p:sld xmlns:a="http://schemas.openxmlformats.org/drawingml/2006/main" xmlns:p="http://schemas.openxmlformats.org/presentationml/2006/main" xmlns:r="http://schemas.openxmlformats.org/officeDocument/2006/relationships">
+<p:sld xmlns:a="http://schemas.openxmlformats.org/drawingml/2006/main" xmlns:r="http://schemas.openxmlformats.org/officeDocument/2006/relationships" xmlns:p="http://schemas.openxmlformats.org/presentationml/2006/main">
   <p:cSld>
     <p:bg>
       <p:bgPr>
@@ -3095,7 +3090,14 @@
         <p:cNvGrpSpPr/>
         <p:nvPr/>
       </p:nvGrpSpPr>
-      <p:grpSpPr/>
+      <p:grpSpPr>
+        <a:xfrm>
+          <a:off x="0" y="0"/>
+          <a:ext cx="0" cy="0"/>
+          <a:chOff x="0" y="0"/>
+          <a:chExt cx="0" cy="0"/>
+        </a:xfrm>
+      </p:grpSpPr>
       <p:sp>
         <p:nvSpPr>
           <p:cNvPr id="2" name="TextBox 1"/>
@@ -3113,7 +3115,7 @@
           <a:noFill/>
         </p:spPr>
         <p:txBody>
-          <a:bodyPr wrap="square" anchor="t" lIns="45720" rIns="45720">
+          <a:bodyPr wrap="square" lIns="45720" rIns="45720" anchor="t">
             <a:spAutoFit/>
           </a:bodyPr>
           <a:lstStyle/>
@@ -3144,7 +3146,7 @@
         <p:spPr>
           <a:xfrm>
             <a:off x="457200" y="868680"/>
-            <a:ext cx="11247120" cy="411480"/>
+            <a:ext cx="11247120" cy="338554"/>
           </a:xfrm>
           <a:prstGeom prst="rect">
             <a:avLst/>
@@ -3152,7 +3154,7 @@
           <a:noFill/>
         </p:spPr>
         <p:txBody>
-          <a:bodyPr wrap="square" anchor="t" lIns="45720" rIns="45720">
+          <a:bodyPr wrap="square" lIns="45720" rIns="45720" anchor="t">
             <a:spAutoFit/>
           </a:bodyPr>
           <a:lstStyle/>
@@ -3163,13 +3165,58 @@
               </a:spcAft>
             </a:pPr>
             <a:r>
-              <a:rPr sz="1600" b="0">
+              <a:rPr lang="ja-JP" altLang="en-US" sz="1600" dirty="0">
                 <a:solidFill>
                   <a:srgbClr val="666666"/>
                 </a:solidFill>
                 <a:latin typeface="Meiryo UI"/>
               </a:rPr>
-              <a:t>由香さんの見立て（感覚でとらえたもので、確かなものではありません）</a:t>
+              <a:t>高橋の見立て</a:t>
+            </a:r>
+            <a:r>
+              <a:rPr sz="1600" b="0" dirty="0">
+                <a:solidFill>
+                  <a:srgbClr val="666666"/>
+                </a:solidFill>
+                <a:latin typeface="Meiryo UI"/>
+              </a:rPr>
+              <a:t>（</a:t>
+            </a:r>
+            <a:r>
+              <a:rPr sz="1600" b="0" dirty="0" err="1">
+                <a:solidFill>
+                  <a:srgbClr val="666666"/>
+                </a:solidFill>
+                <a:latin typeface="Meiryo UI"/>
+              </a:rPr>
+              <a:t>感覚でとらえたもので</a:t>
+            </a:r>
+            <a:r>
+              <a:rPr sz="1600" b="0" dirty="0">
+                <a:solidFill>
+                  <a:srgbClr val="666666"/>
+                </a:solidFill>
+                <a:latin typeface="Meiryo UI"/>
+              </a:rPr>
+              <a:t>、</a:t>
+            </a:r>
+            <a:r>
+              <a:rPr lang="ja-JP" altLang="en-US" sz="1600" b="0" dirty="0">
+                <a:solidFill>
+                  <a:srgbClr val="666666"/>
+                </a:solidFill>
+                <a:latin typeface="Meiryo UI"/>
+              </a:rPr>
+              <a:t>川越さんの参考とされてください</a:t>
+            </a:r>
+            <a:r>
+              <a:rPr sz="1600" b="0" dirty="0">
+                <a:solidFill>
+                  <a:srgbClr val="666666"/>
+                </a:solidFill>
+                <a:latin typeface="Meiryo UI"/>
+              </a:rPr>
+              <a:t>）</a:t>
             </a:r>
           </a:p>
         </p:txBody>
@@ -3215,6 +3262,7 @@
           <a:lstStyle/>
           <a:p>
             <a:pPr algn="ctr"/>
+            <a:endParaRPr/>
           </a:p>
         </p:txBody>
       </p:sp>
@@ -3235,7 +3283,7 @@
           <a:noFill/>
         </p:spPr>
         <p:txBody>
-          <a:bodyPr wrap="square" anchor="t" lIns="45720" rIns="45720">
+          <a:bodyPr wrap="square" lIns="45720" rIns="45720" anchor="t">
             <a:spAutoFit/>
           </a:bodyPr>
           <a:lstStyle/>
@@ -3294,7 +3342,7 @@
           </a:fontRef>
         </p:style>
         <p:txBody>
-          <a:bodyPr rtlCol="0" anchor="ctr" wrap="square" lIns="45720" rIns="45720"/>
+          <a:bodyPr wrap="square" lIns="45720" rIns="45720" rtlCol="0" anchor="ctr"/>
           <a:lstStyle/>
           <a:p>
             <a:pPr algn="ctr"/>
@@ -3431,7 +3479,7 @@
           </a:fontRef>
         </p:style>
         <p:txBody>
-          <a:bodyPr rtlCol="0" anchor="ctr" wrap="square" lIns="45720" rIns="45720"/>
+          <a:bodyPr wrap="square" lIns="45720" rIns="45720" rtlCol="0" anchor="ctr"/>
           <a:lstStyle/>
           <a:p>
             <a:pPr algn="ctr"/>
@@ -3456,7 +3504,7 @@
         <p:spPr>
           <a:xfrm>
             <a:off x="640080" y="4069080"/>
-            <a:ext cx="1965960" cy="1737360"/>
+            <a:ext cx="1965960" cy="1323439"/>
           </a:xfrm>
           <a:prstGeom prst="rect">
             <a:avLst/>
@@ -3464,7 +3512,7 @@
           <a:noFill/>
         </p:spPr>
         <p:txBody>
-          <a:bodyPr wrap="square" anchor="t" lIns="45720" rIns="45720">
+          <a:bodyPr wrap="square" lIns="45720" rIns="45720" anchor="t">
             <a:spAutoFit/>
           </a:bodyPr>
           <a:lstStyle/>
@@ -3475,7 +3523,7 @@
               </a:spcAft>
             </a:pPr>
             <a:r>
-              <a:rPr sz="1300" b="0">
+              <a:rPr sz="1300" b="0" dirty="0" err="1">
                 <a:solidFill>
                   <a:srgbClr val="2A2A2A"/>
                 </a:solidFill>
@@ -3483,6 +3531,12 @@
               </a:rPr>
               <a:t>第一夫人</a:t>
             </a:r>
+            <a:endParaRPr sz="1300" b="0" dirty="0">
+              <a:solidFill>
+                <a:srgbClr val="2A2A2A"/>
+              </a:solidFill>
+              <a:latin typeface="Meiryo UI"/>
+            </a:endParaRPr>
           </a:p>
           <a:p>
             <a:pPr algn="ctr">
@@ -3491,13 +3545,31 @@
               </a:spcAft>
             </a:pPr>
             <a:r>
-              <a:rPr sz="1300" b="0">
+              <a:rPr sz="1300" b="0" dirty="0">
                 <a:solidFill>
                   <a:srgbClr val="2A2A2A"/>
                 </a:solidFill>
                 <a:latin typeface="Meiryo UI"/>
               </a:rPr>
-              <a:t>（政略結婚）</a:t>
+              <a:t>（</a:t>
+            </a:r>
+            <a:r>
+              <a:rPr sz="1300" b="0" dirty="0" err="1">
+                <a:solidFill>
+                  <a:srgbClr val="2A2A2A"/>
+                </a:solidFill>
+                <a:latin typeface="Meiryo UI"/>
+              </a:rPr>
+              <a:t>政略結婚</a:t>
+            </a:r>
+            <a:r>
+              <a:rPr sz="1300" b="0" dirty="0">
+                <a:solidFill>
+                  <a:srgbClr val="2A2A2A"/>
+                </a:solidFill>
+                <a:latin typeface="Meiryo UI"/>
+              </a:rPr>
+              <a:t>）</a:t>
             </a:r>
           </a:p>
           <a:p>
@@ -3507,13 +3579,22 @@
               </a:spcAft>
             </a:pPr>
             <a:r>
-              <a:rPr sz="1300" b="0">
+              <a:rPr sz="1300" b="0" dirty="0" err="1">
                 <a:solidFill>
                   <a:srgbClr val="2A2A2A"/>
                 </a:solidFill>
                 <a:latin typeface="Meiryo UI"/>
               </a:rPr>
-              <a:t>甘えられず、</a:t>
+              <a:t>甘えられず</a:t>
+            </a:r>
+            <a:r>
+              <a:rPr sz="1300" b="0" dirty="0">
+                <a:solidFill>
+                  <a:srgbClr val="2A2A2A"/>
+                </a:solidFill>
+                <a:latin typeface="Meiryo UI"/>
+              </a:rPr>
+              <a:t>、</a:t>
             </a:r>
           </a:p>
           <a:p>
@@ -3523,30 +3604,37 @@
               </a:spcAft>
             </a:pPr>
             <a:r>
-              <a:rPr sz="1300" b="0">
+              <a:rPr lang="ja-JP" altLang="en-US" sz="1300" dirty="0">
                 <a:solidFill>
                   <a:srgbClr val="2A2A2A"/>
                 </a:solidFill>
                 <a:latin typeface="Meiryo UI"/>
               </a:rPr>
-              <a:t>一緒に出かけたいと</a:t>
-            </a:r>
-          </a:p>
-          <a:p>
-            <a:pPr algn="ctr">
-              <a:spcAft>
-                <a:spcPts val="600"/>
-              </a:spcAft>
-            </a:pPr>
-            <a:r>
-              <a:rPr sz="1300" b="0">
+              <a:t>一緒に楽しみたい</a:t>
+            </a:r>
+            <a:br>
+              <a:rPr lang="en-US" altLang="ja-JP" sz="1300" dirty="0">
                 <a:solidFill>
                   <a:srgbClr val="2A2A2A"/>
                 </a:solidFill>
                 <a:latin typeface="Meiryo UI"/>
               </a:rPr>
-              <a:t>言えなかった</a:t>
-            </a:r>
+            </a:br>
+            <a:r>
+              <a:rPr lang="ja-JP" altLang="en-US" sz="1300" dirty="0">
+                <a:solidFill>
+                  <a:srgbClr val="2A2A2A"/>
+                </a:solidFill>
+                <a:latin typeface="Meiryo UI"/>
+              </a:rPr>
+              <a:t>を言えなかった</a:t>
+            </a:r>
+            <a:endParaRPr sz="1300" b="0" dirty="0">
+              <a:solidFill>
+                <a:srgbClr val="2A2A2A"/>
+              </a:solidFill>
+              <a:latin typeface="Meiryo UI"/>
+            </a:endParaRPr>
           </a:p>
         </p:txBody>
       </p:sp>
@@ -3587,7 +3675,7 @@
           </a:fontRef>
         </p:style>
         <p:txBody>
-          <a:bodyPr rtlCol="0" anchor="ctr" wrap="square" lIns="45720" rIns="45720"/>
+          <a:bodyPr wrap="square" lIns="45720" rIns="45720" rtlCol="0" anchor="ctr"/>
           <a:lstStyle/>
           <a:p>
             <a:pPr algn="ctr"/>
@@ -3612,7 +3700,7 @@
         <p:spPr>
           <a:xfrm>
             <a:off x="2788920" y="4069080"/>
-            <a:ext cx="1965960" cy="1737360"/>
+            <a:ext cx="1965960" cy="1400383"/>
           </a:xfrm>
           <a:prstGeom prst="rect">
             <a:avLst/>
@@ -3620,7 +3708,7 @@
           <a:noFill/>
         </p:spPr>
         <p:txBody>
-          <a:bodyPr wrap="square" anchor="t" lIns="45720" rIns="45720">
+          <a:bodyPr wrap="square" lIns="45720" rIns="45720" anchor="t">
             <a:spAutoFit/>
           </a:bodyPr>
           <a:lstStyle/>
@@ -3631,7 +3719,7 @@
               </a:spcAft>
             </a:pPr>
             <a:r>
-              <a:rPr sz="1300" b="0">
+              <a:rPr sz="1300" b="0" dirty="0" err="1">
                 <a:solidFill>
                   <a:srgbClr val="2A2A2A"/>
                 </a:solidFill>
@@ -3639,6 +3727,12 @@
               </a:rPr>
               <a:t>第二夫人</a:t>
             </a:r>
+            <a:endParaRPr sz="1300" b="0" dirty="0">
+              <a:solidFill>
+                <a:srgbClr val="2A2A2A"/>
+              </a:solidFill>
+              <a:latin typeface="Meiryo UI"/>
+            </a:endParaRPr>
           </a:p>
           <a:p>
             <a:pPr algn="ctr">
@@ -3647,7 +3741,7 @@
               </a:spcAft>
             </a:pPr>
             <a:r>
-              <a:rPr sz="1300" b="0">
+              <a:rPr sz="1300" b="0" dirty="0" err="1">
                 <a:solidFill>
                   <a:srgbClr val="2A2A2A"/>
                 </a:solidFill>
@@ -3655,6 +3749,12 @@
               </a:rPr>
               <a:t>川越さんが</a:t>
             </a:r>
+            <a:endParaRPr sz="1300" b="0" dirty="0">
+              <a:solidFill>
+                <a:srgbClr val="2A2A2A"/>
+              </a:solidFill>
+              <a:latin typeface="Meiryo UI"/>
+            </a:endParaRPr>
           </a:p>
           <a:p>
             <a:pPr algn="ctr">
@@ -3663,7 +3763,7 @@
               </a:spcAft>
             </a:pPr>
             <a:r>
-              <a:rPr sz="1300" b="0">
+              <a:rPr sz="1300" b="0" dirty="0" err="1">
                 <a:solidFill>
                   <a:srgbClr val="2A2A2A"/>
                 </a:solidFill>
@@ -3671,6 +3771,12 @@
               </a:rPr>
               <a:t>本当に好きだった人</a:t>
             </a:r>
+            <a:endParaRPr sz="1300" b="0" dirty="0">
+              <a:solidFill>
+                <a:srgbClr val="2A2A2A"/>
+              </a:solidFill>
+              <a:latin typeface="Meiryo UI"/>
+            </a:endParaRPr>
           </a:p>
           <a:p>
             <a:pPr algn="ctr">
@@ -3679,13 +3785,31 @@
               </a:spcAft>
             </a:pPr>
             <a:r>
-              <a:rPr sz="1300" b="0">
+              <a:rPr sz="1300" b="0" dirty="0">
                 <a:solidFill>
                   <a:srgbClr val="2A2A2A"/>
                 </a:solidFill>
                 <a:latin typeface="Meiryo UI"/>
               </a:rPr>
-              <a:t>（由香さんは</a:t>
+              <a:t>（</a:t>
+            </a:r>
+            <a:r>
+              <a:rPr lang="ja-JP" altLang="en-US" sz="1300" dirty="0">
+                <a:solidFill>
+                  <a:srgbClr val="2A2A2A"/>
+                </a:solidFill>
+                <a:latin typeface="Meiryo UI"/>
+              </a:rPr>
+              <a:t>高橋</a:t>
+            </a:r>
+            <a:r>
+              <a:rPr sz="1300" b="0" dirty="0">
+                <a:solidFill>
+                  <a:srgbClr val="2A2A2A"/>
+                </a:solidFill>
+                <a:latin typeface="Meiryo UI"/>
+              </a:rPr>
+              <a:t>は</a:t>
             </a:r>
           </a:p>
           <a:p>
@@ -3695,13 +3819,31 @@
               </a:spcAft>
             </a:pPr>
             <a:r>
-              <a:rPr sz="1300" b="0">
+              <a:rPr sz="1300" b="0" dirty="0" err="1">
                 <a:solidFill>
                   <a:srgbClr val="2A2A2A"/>
                 </a:solidFill>
                 <a:latin typeface="Meiryo UI"/>
               </a:rPr>
-              <a:t>こちらに仕えていた）</a:t>
+              <a:t>こちらに仕えていた</a:t>
+            </a:r>
+            <a:r>
+              <a:rPr lang="ja-JP" altLang="en-US" sz="1300" b="0" dirty="0">
+                <a:solidFill>
+                  <a:srgbClr val="2A2A2A"/>
+                </a:solidFill>
+                <a:latin typeface="Meiryo UI"/>
+              </a:rPr>
+              <a:t>可能性</a:t>
+            </a:r>
+            <a:r>
+              <a:rPr sz="1300" b="0" dirty="0">
+                <a:solidFill>
+                  <a:srgbClr val="2A2A2A"/>
+                </a:solidFill>
+                <a:latin typeface="Meiryo UI"/>
+              </a:rPr>
+              <a:t>）</a:t>
             </a:r>
           </a:p>
         </p:txBody>
@@ -3743,12 +3885,12 @@
           </a:fontRef>
         </p:style>
         <p:txBody>
-          <a:bodyPr rtlCol="0" anchor="ctr" wrap="square" lIns="45720" rIns="45720"/>
+          <a:bodyPr wrap="square" lIns="45720" rIns="45720" rtlCol="0" anchor="ctr"/>
           <a:lstStyle/>
           <a:p>
             <a:pPr algn="ctr"/>
             <a:r>
-              <a:rPr sz="1300" b="1">
+              <a:rPr sz="1300" b="1" dirty="0" err="1">
                 <a:solidFill>
                   <a:srgbClr val="2B2350"/>
                 </a:solidFill>
@@ -3756,18 +3898,57 @@
               </a:rPr>
               <a:t>前世の罪滅ぼしは、もう終わっています</a:t>
             </a:r>
+            <a:endParaRPr sz="1300" b="1" dirty="0">
+              <a:solidFill>
+                <a:srgbClr val="2B2350"/>
+              </a:solidFill>
+              <a:latin typeface="Meiryo UI"/>
+            </a:endParaRPr>
           </a:p>
           <a:p>
             <a:pPr algn="ctr"/>
             <a:r>
-              <a:rPr sz="1300" b="1">
+              <a:rPr sz="1300" b="1" dirty="0" err="1">
                 <a:solidFill>
                   <a:srgbClr val="2B2350"/>
                 </a:solidFill>
                 <a:latin typeface="Meiryo UI"/>
               </a:rPr>
-              <a:t>一緒に出かけ、食事を楽しめたことで解消。彼女の結婚が「満足できた」しるし</a:t>
-            </a:r>
+              <a:t>一緒に出かけ、食事を楽しめたことで解消。彼女の結婚が</a:t>
+            </a:r>
+            <a:r>
+              <a:rPr lang="ja-JP" altLang="en-US" sz="1300" b="1" dirty="0">
+                <a:solidFill>
+                  <a:srgbClr val="2B2350"/>
+                </a:solidFill>
+                <a:latin typeface="Meiryo UI"/>
+              </a:rPr>
+              <a:t>カルマが</a:t>
+            </a:r>
+            <a:r>
+              <a:rPr sz="1300" b="1" dirty="0">
+                <a:solidFill>
+                  <a:srgbClr val="2B2350"/>
+                </a:solidFill>
+                <a:latin typeface="Meiryo UI"/>
+              </a:rPr>
+              <a:t>「</a:t>
+            </a:r>
+            <a:r>
+              <a:rPr sz="1300" b="1" dirty="0" err="1">
+                <a:solidFill>
+                  <a:srgbClr val="2B2350"/>
+                </a:solidFill>
+                <a:latin typeface="Meiryo UI"/>
+              </a:rPr>
+              <a:t>満足できた」しるし</a:t>
+            </a:r>
+            <a:endParaRPr sz="1300" b="1" dirty="0">
+              <a:solidFill>
+                <a:srgbClr val="2B2350"/>
+              </a:solidFill>
+              <a:latin typeface="Meiryo UI"/>
+            </a:endParaRPr>
           </a:p>
         </p:txBody>
       </p:sp>
@@ -3788,7 +3969,7 @@
           <a:noFill/>
         </p:spPr>
         <p:txBody>
-          <a:bodyPr wrap="square" anchor="t" lIns="45720" rIns="45720">
+          <a:bodyPr wrap="square" lIns="45720" rIns="45720" anchor="t">
             <a:spAutoFit/>
           </a:bodyPr>
           <a:lstStyle/>
@@ -3851,6 +4032,7 @@
           <a:lstStyle/>
           <a:p>
             <a:pPr algn="ctr"/>
+            <a:endParaRPr/>
           </a:p>
         </p:txBody>
       </p:sp>
@@ -3891,7 +4073,7 @@
           </a:fontRef>
         </p:style>
         <p:txBody>
-          <a:bodyPr rtlCol="0" anchor="ctr" wrap="square" lIns="45720" rIns="45720"/>
+          <a:bodyPr wrap="square" lIns="45720" rIns="45720" rtlCol="0" anchor="ctr"/>
           <a:lstStyle/>
           <a:p>
             <a:pPr algn="ctr"/>
@@ -3924,7 +4106,7 @@
           <a:noFill/>
         </p:spPr>
         <p:txBody>
-          <a:bodyPr wrap="square" anchor="ctr" lIns="45720" rIns="45720">
+          <a:bodyPr wrap="square" lIns="45720" rIns="45720" anchor="ctr">
             <a:spAutoFit/>
           </a:bodyPr>
           <a:lstStyle/>
@@ -4001,7 +4183,7 @@
           <a:noFill/>
         </p:spPr>
         <p:txBody>
-          <a:bodyPr wrap="square" anchor="ctr" lIns="45720" rIns="45720">
+          <a:bodyPr wrap="square" lIns="45720" rIns="45720" anchor="ctr">
             <a:spAutoFit/>
           </a:bodyPr>
           <a:lstStyle/>
@@ -4065,6 +4247,7 @@
           <a:lstStyle/>
           <a:p>
             <a:pPr algn="ctr"/>
+            <a:endParaRPr/>
           </a:p>
         </p:txBody>
       </p:sp>
@@ -4105,12 +4288,12 @@
           </a:fontRef>
         </p:style>
         <p:txBody>
-          <a:bodyPr rtlCol="0" anchor="ctr" wrap="square" lIns="45720" rIns="45720"/>
+          <a:bodyPr wrap="square" lIns="45720" rIns="45720" rtlCol="0" anchor="ctr"/>
           <a:lstStyle/>
           <a:p>
             <a:pPr algn="ctr"/>
             <a:r>
-              <a:rPr sz="1600" b="1">
+              <a:rPr sz="1600" b="1" dirty="0" err="1">
                 <a:solidFill>
                   <a:srgbClr val="FFFFFF"/>
                 </a:solidFill>
@@ -4118,6 +4301,30 @@
               </a:rPr>
               <a:t>今の関係を大切にする</a:t>
             </a:r>
+            <a:endParaRPr lang="en-US" sz="1600" b="1" dirty="0">
+              <a:solidFill>
+                <a:srgbClr val="FFFFFF"/>
+              </a:solidFill>
+              <a:latin typeface="Meiryo UI"/>
+            </a:endParaRPr>
+          </a:p>
+          <a:p>
+            <a:pPr algn="ctr"/>
+            <a:r>
+              <a:rPr lang="ja-JP" altLang="en-US" sz="1600" b="1" dirty="0">
+                <a:solidFill>
+                  <a:srgbClr val="FFFFFF"/>
+                </a:solidFill>
+                <a:latin typeface="Meiryo UI"/>
+              </a:rPr>
+              <a:t>又は手放す</a:t>
+            </a:r>
+            <a:endParaRPr sz="1600" b="1" dirty="0">
+              <a:solidFill>
+                <a:srgbClr val="FFFFFF"/>
+              </a:solidFill>
+              <a:latin typeface="Meiryo UI"/>
+            </a:endParaRPr>
           </a:p>
         </p:txBody>
       </p:sp>
@@ -4138,7 +4345,7 @@
           <a:noFill/>
         </p:spPr>
         <p:txBody>
-          <a:bodyPr wrap="square" anchor="ctr" lIns="45720" rIns="45720">
+          <a:bodyPr wrap="square" lIns="45720" rIns="45720" anchor="ctr">
             <a:spAutoFit/>
           </a:bodyPr>
           <a:lstStyle/>
@@ -4214,7 +4421,7 @@
           <a:noFill/>
         </p:spPr>
         <p:txBody>
-          <a:bodyPr wrap="square" anchor="ctr" lIns="45720" rIns="45720">
+          <a:bodyPr wrap="square" lIns="45720" rIns="45720" anchor="ctr">
             <a:spAutoFit/>
           </a:bodyPr>
           <a:lstStyle/>
@@ -4274,7 +4481,7 @@
           </a:fontRef>
         </p:style>
         <p:txBody>
-          <a:bodyPr rtlCol="0" anchor="ctr" wrap="square" lIns="45720" rIns="45720"/>
+          <a:bodyPr wrap="square" lIns="45720" rIns="45720" rtlCol="0" anchor="ctr"/>
           <a:lstStyle/>
           <a:p>
             <a:pPr algn="ctr"/>

--- a/20_Projects/海音_心体の調律/タマラ/川越さん/20261014_ご縁と考え方_お食事の方.pptx
+++ b/20_Projects/海音_心体の調律/タマラ/川越さん/20261014_ご縁と考え方_お食事の方.pptx
@@ -3165,13 +3165,22 @@
               </a:spcAft>
             </a:pPr>
             <a:r>
-              <a:rPr lang="ja-JP" altLang="en-US" sz="1600" dirty="0">
+              <a:rPr lang="ja-JP" altLang="en-US" sz="1600">
                 <a:solidFill>
                   <a:srgbClr val="666666"/>
                 </a:solidFill>
                 <a:latin typeface="Meiryo UI"/>
               </a:rPr>
-              <a:t>高橋の見立て</a:t>
+              <a:t>髙橋の</a:t>
+            </a:r>
+            <a:r>
+              <a:rPr lang="ja-JP" altLang="en-US" sz="1600" dirty="0">
+                <a:solidFill>
+                  <a:srgbClr val="666666"/>
+                </a:solidFill>
+                <a:latin typeface="Meiryo UI"/>
+              </a:rPr>
+              <a:t>見立て</a:t>
             </a:r>
             <a:r>
               <a:rPr sz="1600" b="0" dirty="0">
@@ -3207,10 +3216,19 @@
                 </a:solidFill>
                 <a:latin typeface="Meiryo UI"/>
               </a:rPr>
-              <a:t>川越さんの参考とされてください</a:t>
-            </a:r>
-            <a:r>
-              <a:rPr sz="1600" b="0" dirty="0">
+              <a:t>川越</a:t>
+            </a:r>
+            <a:r>
+              <a:rPr lang="ja-JP" altLang="en-US" sz="1600" b="0">
+                <a:solidFill>
+                  <a:srgbClr val="666666"/>
+                </a:solidFill>
+                <a:latin typeface="Meiryo UI"/>
+              </a:rPr>
+              <a:t>さんの参考になさってください</a:t>
+            </a:r>
+            <a:r>
+              <a:rPr sz="1600" b="0">
                 <a:solidFill>
                   <a:srgbClr val="666666"/>
                 </a:solidFill>
@@ -3218,6 +3236,12 @@
               </a:rPr>
               <a:t>）</a:t>
             </a:r>
+            <a:endParaRPr sz="1600" b="0" dirty="0">
+              <a:solidFill>
+                <a:srgbClr val="666666"/>
+              </a:solidFill>
+              <a:latin typeface="Meiryo UI"/>
+            </a:endParaRPr>
           </a:p>
         </p:txBody>
       </p:sp>
@@ -3613,7 +3637,7 @@
               <a:t>一緒に楽しみたい</a:t>
             </a:r>
             <a:br>
-              <a:rPr lang="en-US" altLang="ja-JP" sz="1300" dirty="0">
+              <a:rPr lang="en-US" altLang="ja-JP" sz="1300">
                 <a:solidFill>
                   <a:srgbClr val="2A2A2A"/>
                 </a:solidFill>
@@ -3621,13 +3645,13 @@
               </a:rPr>
             </a:br>
             <a:r>
-              <a:rPr lang="ja-JP" altLang="en-US" sz="1300" dirty="0">
+              <a:rPr lang="ja-JP" altLang="en-US" sz="1300">
                 <a:solidFill>
                   <a:srgbClr val="2A2A2A"/>
                 </a:solidFill>
                 <a:latin typeface="Meiryo UI"/>
               </a:rPr>
-              <a:t>を言えなかった</a:t>
+              <a:t>と言えなかった</a:t>
             </a:r>
             <a:endParaRPr sz="1300" b="0" dirty="0">
               <a:solidFill>
@@ -3785,7 +3809,7 @@
               </a:spcAft>
             </a:pPr>
             <a:r>
-              <a:rPr sz="1300" b="0" dirty="0">
+              <a:rPr sz="1300" b="0">
                 <a:solidFill>
                   <a:srgbClr val="2A2A2A"/>
                 </a:solidFill>
@@ -3794,16 +3818,16 @@
               <a:t>（</a:t>
             </a:r>
             <a:r>
-              <a:rPr lang="ja-JP" altLang="en-US" sz="1300" dirty="0">
+              <a:rPr lang="ja-JP" altLang="en-US" sz="1300">
                 <a:solidFill>
                   <a:srgbClr val="2A2A2A"/>
                 </a:solidFill>
                 <a:latin typeface="Meiryo UI"/>
               </a:rPr>
-              <a:t>高橋</a:t>
-            </a:r>
-            <a:r>
-              <a:rPr sz="1300" b="0" dirty="0">
+              <a:t>髙橋</a:t>
+            </a:r>
+            <a:r>
+              <a:rPr sz="1300" b="0">
                 <a:solidFill>
                   <a:srgbClr val="2A2A2A"/>
                 </a:solidFill>
@@ -3811,6 +3835,12 @@
               </a:rPr>
               <a:t>は</a:t>
             </a:r>
+            <a:endParaRPr sz="1300" b="0" dirty="0">
+              <a:solidFill>
+                <a:srgbClr val="2A2A2A"/>
+              </a:solidFill>
+              <a:latin typeface="Meiryo UI"/>
+            </a:endParaRPr>
           </a:p>
           <a:p>
             <a:pPr algn="ctr">
@@ -3914,19 +3944,37 @@
                 </a:solidFill>
                 <a:latin typeface="Meiryo UI"/>
               </a:rPr>
-              <a:t>一緒に出かけ、食事を楽しめたことで解消。彼女の結婚が</a:t>
-            </a:r>
-            <a:r>
-              <a:rPr lang="ja-JP" altLang="en-US" sz="1300" b="1" dirty="0">
+              <a:t>一緒に出かけ、</a:t>
+            </a:r>
+            <a:r>
+              <a:rPr sz="1300" b="1" err="1">
                 <a:solidFill>
                   <a:srgbClr val="2B2350"/>
                 </a:solidFill>
                 <a:latin typeface="Meiryo UI"/>
               </a:rPr>
-              <a:t>カルマが</a:t>
-            </a:r>
-            <a:r>
-              <a:rPr sz="1300" b="1" dirty="0">
+              <a:t>食事を楽しめたことで解消</a:t>
+            </a:r>
+            <a:r>
+              <a:rPr sz="1300" b="1">
+                <a:solidFill>
+                  <a:srgbClr val="2B2350"/>
+                </a:solidFill>
+                <a:latin typeface="Meiryo UI"/>
+              </a:rPr>
+              <a:t>。</a:t>
+            </a:r>
+            <a:r>
+              <a:rPr lang="ja-JP" altLang="en-US" sz="1300" b="1">
+                <a:solidFill>
+                  <a:srgbClr val="2B2350"/>
+                </a:solidFill>
+                <a:latin typeface="Meiryo UI"/>
+              </a:rPr>
+              <a:t>彼女の結婚は、カルマが</a:t>
+            </a:r>
+            <a:r>
+              <a:rPr sz="1300" b="1">
                 <a:solidFill>
                   <a:srgbClr val="2B2350"/>
                 </a:solidFill>
@@ -4297,7 +4345,8 @@
                 <a:solidFill>
                   <a:srgbClr val="FFFFFF"/>
                 </a:solidFill>
-                <a:latin typeface="Meiryo UI"/>
+                <a:latin typeface="Meiryo UI" panose="020B0604030504040204" pitchFamily="50" charset="-128"/>
+                <a:ea typeface="Meiryo UI" panose="020B0604030504040204" pitchFamily="50" charset="-128"/>
               </a:rPr>
               <a:t>今の関係を大切にする</a:t>
             </a:r>
@@ -4305,25 +4354,28 @@
               <a:solidFill>
                 <a:srgbClr val="FFFFFF"/>
               </a:solidFill>
-              <a:latin typeface="Meiryo UI"/>
+              <a:latin typeface="Meiryo UI" panose="020B0604030504040204" pitchFamily="50" charset="-128"/>
+              <a:ea typeface="Meiryo UI" panose="020B0604030504040204" pitchFamily="50" charset="-128"/>
             </a:endParaRPr>
           </a:p>
           <a:p>
             <a:pPr algn="ctr"/>
             <a:r>
-              <a:rPr lang="ja-JP" altLang="en-US" sz="1600" b="1" dirty="0">
+              <a:rPr lang="ja-JP" altLang="en-US" sz="1600" b="1">
                 <a:solidFill>
                   <a:srgbClr val="FFFFFF"/>
                 </a:solidFill>
-                <a:latin typeface="Meiryo UI"/>
+                <a:latin typeface="Meiryo UI" panose="020B0604030504040204" pitchFamily="50" charset="-128"/>
+                <a:ea typeface="Meiryo UI" panose="020B0604030504040204" pitchFamily="50" charset="-128"/>
               </a:rPr>
-              <a:t>又は手放す</a:t>
+              <a:t>または手放す</a:t>
             </a:r>
             <a:endParaRPr sz="1600" b="1" dirty="0">
               <a:solidFill>
                 <a:srgbClr val="FFFFFF"/>
               </a:solidFill>
-              <a:latin typeface="Meiryo UI"/>
+              <a:latin typeface="Meiryo UI" panose="020B0604030504040204" pitchFamily="50" charset="-128"/>
+              <a:ea typeface="Meiryo UI" panose="020B0604030504040204" pitchFamily="50" charset="-128"/>
             </a:endParaRPr>
           </a:p>
         </p:txBody>
